--- a/public/templates/report_template.pptx
+++ b/public/templates/report_template.pptx
@@ -1,38 +1,60 @@
 
 <file path=ppt/presentation.xml><?xml version="1.0" encoding="utf-8"?>
-<p:presentation xmlns:a="http://schemas.openxmlformats.org/drawingml/2006/main" xmlns:r="http://schemas.openxmlformats.org/officeDocument/2006/relationships" xmlns:p="http://schemas.openxmlformats.org/presentationml/2006/main" saveSubsetFonts="1" embedTrueTypeFonts="true">
+<p:presentation xmlns:a="http://schemas.openxmlformats.org/drawingml/2006/main" xmlns:r="http://schemas.openxmlformats.org/officeDocument/2006/relationships" xmlns:p="http://schemas.openxmlformats.org/presentationml/2006/main" embedTrueTypeFonts="1" saveSubsetFonts="1">
   <p:sldMasterIdLst>
     <p:sldMasterId id="2147483648" r:id="rId1"/>
   </p:sldMasterIdLst>
   <p:sldIdLst>
-    <p:sldId id="256" r:id="rId6"/>
+    <p:sldId id="256" r:id="rId2"/>
   </p:sldIdLst>
   <p:sldSz cx="10693400" cy="15113000"/>
   <p:notesSz cx="6858000" cy="9144000"/>
   <p:embeddedFontLst>
     <p:embeddedFont>
-      <p:font typeface="Open Sans" charset="1" panose="020B0606030504020204"/>
-      <p:regular r:id="rId7"/>
+      <p:font typeface="Arab Times" panose="020B0604020202020204" charset="-78"/>
+      <p:regular r:id="rId3"/>
     </p:embeddedFont>
     <p:embeddedFont>
-      <p:font typeface="Arab Times" charset="1" panose="02000400000000000000"/>
+      <p:font typeface="Calibri" panose="020F0502020204030204" pitchFamily="34" charset="0"/>
+      <p:regular r:id="rId4"/>
+      <p:bold r:id="rId5"/>
+    </p:embeddedFont>
+    <p:embeddedFont>
+      <p:font typeface="Dubai" panose="020B0503030403030204" pitchFamily="34" charset="-78"/>
+      <p:regular r:id="rId6"/>
+      <p:bold r:id="rId7"/>
+    </p:embeddedFont>
+    <p:embeddedFont>
+      <p:font typeface="Noto Sans Arabic" panose="020B0604020202020204"/>
       <p:regular r:id="rId8"/>
     </p:embeddedFont>
     <p:embeddedFont>
-      <p:font typeface="Noto Sans Arabic Bold" charset="1" panose="020B0802040504020204"/>
+      <p:font typeface="Open Sans" panose="020B0606030504020204" pitchFamily="34" charset="0"/>
       <p:regular r:id="rId9"/>
+      <p:bold r:id="rId10"/>
+      <p:italic r:id="rId11"/>
+      <p:boldItalic r:id="rId12"/>
     </p:embeddedFont>
     <p:embeddedFont>
-      <p:font typeface="Times New Roman Bold" charset="1" panose="02020803070505020304"/>
-      <p:regular r:id="rId10"/>
+      <p:font typeface="Segoe UI" panose="020B0502040204020203" pitchFamily="34" charset="0"/>
+      <p:regular r:id="rId13"/>
+      <p:bold r:id="rId14"/>
+      <p:italic r:id="rId15"/>
+      <p:boldItalic r:id="rId16"/>
     </p:embeddedFont>
     <p:embeddedFont>
-      <p:font typeface="Times New Roman" charset="1" panose="02020603050405020304"/>
-      <p:regular r:id="rId11"/>
+      <p:font typeface="Tahoma" panose="020B0604030504040204" pitchFamily="34" charset="0"/>
+      <p:regular r:id="rId17"/>
+      <p:bold r:id="rId18"/>
     </p:embeddedFont>
     <p:embeddedFont>
-      <p:font typeface="Noto Sans Arabic" charset="1" panose="020B0502040504020204"/>
-      <p:regular r:id="rId12"/>
+      <p:font typeface="Times New Roman" panose="02020603050405020304" pitchFamily="18" charset="0"/>
+      <p:regular r:id="rId19"/>
+    </p:embeddedFont>
+    <p:embeddedFont>
+      <p:font typeface="Times New Roman Bold" panose="02020803070505020304" pitchFamily="18" charset="0"/>
+      <p:regular r:id="rId20"/>
+      <p:bold r:id="rId21"/>
     </p:embeddedFont>
   </p:embeddedFontLst>
   <p:defaultTextStyle>
@@ -130,6 +152,22 @@
       </a:defRPr>
     </a:lvl9pPr>
   </p:defaultTextStyle>
+  <p:extLst>
+    <p:ext uri="{EFAFB233-063F-42B5-8137-9DF3F51BA10A}">
+      <p15:sldGuideLst xmlns:p15="http://schemas.microsoft.com/office/powerpoint/2012/main">
+        <p15:guide id="1" orient="horz" pos="2160">
+          <p15:clr>
+            <a:srgbClr val="A4A3A4"/>
+          </p15:clr>
+        </p15:guide>
+        <p15:guide id="2" pos="2880">
+          <p15:clr>
+            <a:srgbClr val="A4A3A4"/>
+          </p15:clr>
+        </p15:guide>
+      </p15:sldGuideLst>
+    </p:ext>
+  </p:extLst>
 </p:presentation>
 </file>
 
@@ -171,10 +209,9 @@
           <a:lstStyle/>
           <a:p>
             <a:r>
-              <a:rPr lang="en-US" smtClean="0"/>
+              <a:rPr lang="en-US"/>
               <a:t>Click to edit Master title style</a:t>
             </a:r>
-            <a:endParaRPr lang="en-US"/>
           </a:p>
         </p:txBody>
       </p:sp>
@@ -290,10 +327,9 @@
           </a:lstStyle>
           <a:p>
             <a:r>
-              <a:rPr lang="en-US" smtClean="0"/>
+              <a:rPr lang="en-US"/>
               <a:t>Click to edit Master subtitle style</a:t>
             </a:r>
-            <a:endParaRPr lang="en-US"/>
           </a:p>
         </p:txBody>
       </p:sp>
@@ -315,7 +351,7 @@
             <a:fld id="{1D8BD707-D9CF-40AE-B4C6-C98DA3205C09}" type="datetimeFigureOut">
               <a:rPr lang="en-US" smtClean="0"/>
               <a:pPr/>
-              <a:t>8/1/2011</a:t>
+              <a:t>4/2/2026</a:t>
             </a:fld>
             <a:endParaRPr lang="en-US"/>
           </a:p>
@@ -405,10 +441,9 @@
           <a:lstStyle/>
           <a:p>
             <a:r>
-              <a:rPr lang="en-US" smtClean="0"/>
+              <a:rPr lang="en-US"/>
               <a:t>Click to edit Master title style</a:t>
             </a:r>
-            <a:endParaRPr lang="en-US"/>
           </a:p>
         </p:txBody>
       </p:sp>
@@ -429,38 +464,37 @@
           <a:p>
             <a:pPr lvl="0"/>
             <a:r>
-              <a:rPr lang="en-US" smtClean="0"/>
+              <a:rPr lang="en-US"/>
               <a:t>Click to edit Master text styles</a:t>
             </a:r>
           </a:p>
           <a:p>
             <a:pPr lvl="1"/>
             <a:r>
-              <a:rPr lang="en-US" smtClean="0"/>
+              <a:rPr lang="en-US"/>
               <a:t>Second level</a:t>
             </a:r>
           </a:p>
           <a:p>
             <a:pPr lvl="2"/>
             <a:r>
-              <a:rPr lang="en-US" smtClean="0"/>
+              <a:rPr lang="en-US"/>
               <a:t>Third level</a:t>
             </a:r>
           </a:p>
           <a:p>
             <a:pPr lvl="3"/>
             <a:r>
-              <a:rPr lang="en-US" smtClean="0"/>
+              <a:rPr lang="en-US"/>
               <a:t>Fourth level</a:t>
             </a:r>
           </a:p>
           <a:p>
             <a:pPr lvl="4"/>
             <a:r>
-              <a:rPr lang="en-US" smtClean="0"/>
+              <a:rPr lang="en-US"/>
               <a:t>Fifth level</a:t>
             </a:r>
-            <a:endParaRPr lang="en-US"/>
           </a:p>
         </p:txBody>
       </p:sp>
@@ -482,7 +516,7 @@
             <a:fld id="{1D8BD707-D9CF-40AE-B4C6-C98DA3205C09}" type="datetimeFigureOut">
               <a:rPr lang="en-US" smtClean="0"/>
               <a:pPr/>
-              <a:t>8/1/2011</a:t>
+              <a:t>4/2/2026</a:t>
             </a:fld>
             <a:endParaRPr lang="en-US"/>
           </a:p>
@@ -577,10 +611,9 @@
           <a:lstStyle/>
           <a:p>
             <a:r>
-              <a:rPr lang="en-US" smtClean="0"/>
+              <a:rPr lang="en-US"/>
               <a:t>Click to edit Master title style</a:t>
             </a:r>
-            <a:endParaRPr lang="en-US"/>
           </a:p>
         </p:txBody>
       </p:sp>
@@ -606,38 +639,37 @@
           <a:p>
             <a:pPr lvl="0"/>
             <a:r>
-              <a:rPr lang="en-US" smtClean="0"/>
+              <a:rPr lang="en-US"/>
               <a:t>Click to edit Master text styles</a:t>
             </a:r>
           </a:p>
           <a:p>
             <a:pPr lvl="1"/>
             <a:r>
-              <a:rPr lang="en-US" smtClean="0"/>
+              <a:rPr lang="en-US"/>
               <a:t>Second level</a:t>
             </a:r>
           </a:p>
           <a:p>
             <a:pPr lvl="2"/>
             <a:r>
-              <a:rPr lang="en-US" smtClean="0"/>
+              <a:rPr lang="en-US"/>
               <a:t>Third level</a:t>
             </a:r>
           </a:p>
           <a:p>
             <a:pPr lvl="3"/>
             <a:r>
-              <a:rPr lang="en-US" smtClean="0"/>
+              <a:rPr lang="en-US"/>
               <a:t>Fourth level</a:t>
             </a:r>
           </a:p>
           <a:p>
             <a:pPr lvl="4"/>
             <a:r>
-              <a:rPr lang="en-US" smtClean="0"/>
+              <a:rPr lang="en-US"/>
               <a:t>Fifth level</a:t>
             </a:r>
-            <a:endParaRPr lang="en-US"/>
           </a:p>
         </p:txBody>
       </p:sp>
@@ -659,7 +691,7 @@
             <a:fld id="{1D8BD707-D9CF-40AE-B4C6-C98DA3205C09}" type="datetimeFigureOut">
               <a:rPr lang="en-US" smtClean="0"/>
               <a:pPr/>
-              <a:t>8/1/2011</a:t>
+              <a:t>4/2/2026</a:t>
             </a:fld>
             <a:endParaRPr lang="en-US"/>
           </a:p>
@@ -749,10 +781,9 @@
           <a:lstStyle/>
           <a:p>
             <a:r>
-              <a:rPr lang="en-US" smtClean="0"/>
+              <a:rPr lang="en-US"/>
               <a:t>Click to edit Master title style</a:t>
             </a:r>
-            <a:endParaRPr lang="en-US"/>
           </a:p>
         </p:txBody>
       </p:sp>
@@ -773,38 +804,37 @@
           <a:p>
             <a:pPr lvl="0"/>
             <a:r>
-              <a:rPr lang="en-US" smtClean="0"/>
+              <a:rPr lang="en-US"/>
               <a:t>Click to edit Master text styles</a:t>
             </a:r>
           </a:p>
           <a:p>
             <a:pPr lvl="1"/>
             <a:r>
-              <a:rPr lang="en-US" smtClean="0"/>
+              <a:rPr lang="en-US"/>
               <a:t>Second level</a:t>
             </a:r>
           </a:p>
           <a:p>
             <a:pPr lvl="2"/>
             <a:r>
-              <a:rPr lang="en-US" smtClean="0"/>
+              <a:rPr lang="en-US"/>
               <a:t>Third level</a:t>
             </a:r>
           </a:p>
           <a:p>
             <a:pPr lvl="3"/>
             <a:r>
-              <a:rPr lang="en-US" smtClean="0"/>
+              <a:rPr lang="en-US"/>
               <a:t>Fourth level</a:t>
             </a:r>
           </a:p>
           <a:p>
             <a:pPr lvl="4"/>
             <a:r>
-              <a:rPr lang="en-US" smtClean="0"/>
+              <a:rPr lang="en-US"/>
               <a:t>Fifth level</a:t>
             </a:r>
-            <a:endParaRPr lang="en-US"/>
           </a:p>
         </p:txBody>
       </p:sp>
@@ -826,7 +856,7 @@
             <a:fld id="{1D8BD707-D9CF-40AE-B4C6-C98DA3205C09}" type="datetimeFigureOut">
               <a:rPr lang="en-US" smtClean="0"/>
               <a:pPr/>
-              <a:t>8/1/2011</a:t>
+              <a:t>4/2/2026</a:t>
             </a:fld>
             <a:endParaRPr lang="en-US"/>
           </a:p>
@@ -925,10 +955,9 @@
           </a:lstStyle>
           <a:p>
             <a:r>
-              <a:rPr lang="en-US" smtClean="0"/>
+              <a:rPr lang="en-US"/>
               <a:t>Click to edit Master title style</a:t>
             </a:r>
-            <a:endParaRPr lang="en-US"/>
           </a:p>
         </p:txBody>
       </p:sp>
@@ -1045,7 +1074,7 @@
           <a:p>
             <a:pPr lvl="0"/>
             <a:r>
-              <a:rPr lang="en-US" smtClean="0"/>
+              <a:rPr lang="en-US"/>
               <a:t>Click to edit Master text styles</a:t>
             </a:r>
           </a:p>
@@ -1069,7 +1098,7 @@
             <a:fld id="{1D8BD707-D9CF-40AE-B4C6-C98DA3205C09}" type="datetimeFigureOut">
               <a:rPr lang="en-US" smtClean="0"/>
               <a:pPr/>
-              <a:t>8/1/2011</a:t>
+              <a:t>4/2/2026</a:t>
             </a:fld>
             <a:endParaRPr lang="en-US"/>
           </a:p>
@@ -1159,10 +1188,9 @@
           <a:lstStyle/>
           <a:p>
             <a:r>
-              <a:rPr lang="en-US" smtClean="0"/>
+              <a:rPr lang="en-US"/>
               <a:t>Click to edit Master title style</a:t>
             </a:r>
-            <a:endParaRPr lang="en-US"/>
           </a:p>
         </p:txBody>
       </p:sp>
@@ -1216,38 +1244,37 @@
           <a:p>
             <a:pPr lvl="0"/>
             <a:r>
-              <a:rPr lang="en-US" smtClean="0"/>
+              <a:rPr lang="en-US"/>
               <a:t>Click to edit Master text styles</a:t>
             </a:r>
           </a:p>
           <a:p>
             <a:pPr lvl="1"/>
             <a:r>
-              <a:rPr lang="en-US" smtClean="0"/>
+              <a:rPr lang="en-US"/>
               <a:t>Second level</a:t>
             </a:r>
           </a:p>
           <a:p>
             <a:pPr lvl="2"/>
             <a:r>
-              <a:rPr lang="en-US" smtClean="0"/>
+              <a:rPr lang="en-US"/>
               <a:t>Third level</a:t>
             </a:r>
           </a:p>
           <a:p>
             <a:pPr lvl="3"/>
             <a:r>
-              <a:rPr lang="en-US" smtClean="0"/>
+              <a:rPr lang="en-US"/>
               <a:t>Fourth level</a:t>
             </a:r>
           </a:p>
           <a:p>
             <a:pPr lvl="4"/>
             <a:r>
-              <a:rPr lang="en-US" smtClean="0"/>
+              <a:rPr lang="en-US"/>
               <a:t>Fifth level</a:t>
             </a:r>
-            <a:endParaRPr lang="en-US"/>
           </a:p>
         </p:txBody>
       </p:sp>
@@ -1301,38 +1328,37 @@
           <a:p>
             <a:pPr lvl="0"/>
             <a:r>
-              <a:rPr lang="en-US" smtClean="0"/>
+              <a:rPr lang="en-US"/>
               <a:t>Click to edit Master text styles</a:t>
             </a:r>
           </a:p>
           <a:p>
             <a:pPr lvl="1"/>
             <a:r>
-              <a:rPr lang="en-US" smtClean="0"/>
+              <a:rPr lang="en-US"/>
               <a:t>Second level</a:t>
             </a:r>
           </a:p>
           <a:p>
             <a:pPr lvl="2"/>
             <a:r>
-              <a:rPr lang="en-US" smtClean="0"/>
+              <a:rPr lang="en-US"/>
               <a:t>Third level</a:t>
             </a:r>
           </a:p>
           <a:p>
             <a:pPr lvl="3"/>
             <a:r>
-              <a:rPr lang="en-US" smtClean="0"/>
+              <a:rPr lang="en-US"/>
               <a:t>Fourth level</a:t>
             </a:r>
           </a:p>
           <a:p>
             <a:pPr lvl="4"/>
             <a:r>
-              <a:rPr lang="en-US" smtClean="0"/>
+              <a:rPr lang="en-US"/>
               <a:t>Fifth level</a:t>
             </a:r>
-            <a:endParaRPr lang="en-US"/>
           </a:p>
         </p:txBody>
       </p:sp>
@@ -1354,7 +1380,7 @@
             <a:fld id="{1D8BD707-D9CF-40AE-B4C6-C98DA3205C09}" type="datetimeFigureOut">
               <a:rPr lang="en-US" smtClean="0"/>
               <a:pPr/>
-              <a:t>8/1/2011</a:t>
+              <a:t>4/2/2026</a:t>
             </a:fld>
             <a:endParaRPr lang="en-US"/>
           </a:p>
@@ -1448,10 +1474,9 @@
           </a:lstStyle>
           <a:p>
             <a:r>
-              <a:rPr lang="en-US" smtClean="0"/>
+              <a:rPr lang="en-US"/>
               <a:t>Click to edit Master title style</a:t>
             </a:r>
-            <a:endParaRPr lang="en-US"/>
           </a:p>
         </p:txBody>
       </p:sp>
@@ -1514,7 +1539,7 @@
           <a:p>
             <a:pPr lvl="0"/>
             <a:r>
-              <a:rPr lang="en-US" smtClean="0"/>
+              <a:rPr lang="en-US"/>
               <a:t>Click to edit Master text styles</a:t>
             </a:r>
           </a:p>
@@ -1570,38 +1595,37 @@
           <a:p>
             <a:pPr lvl="0"/>
             <a:r>
-              <a:rPr lang="en-US" smtClean="0"/>
+              <a:rPr lang="en-US"/>
               <a:t>Click to edit Master text styles</a:t>
             </a:r>
           </a:p>
           <a:p>
             <a:pPr lvl="1"/>
             <a:r>
-              <a:rPr lang="en-US" smtClean="0"/>
+              <a:rPr lang="en-US"/>
               <a:t>Second level</a:t>
             </a:r>
           </a:p>
           <a:p>
             <a:pPr lvl="2"/>
             <a:r>
-              <a:rPr lang="en-US" smtClean="0"/>
+              <a:rPr lang="en-US"/>
               <a:t>Third level</a:t>
             </a:r>
           </a:p>
           <a:p>
             <a:pPr lvl="3"/>
             <a:r>
-              <a:rPr lang="en-US" smtClean="0"/>
+              <a:rPr lang="en-US"/>
               <a:t>Fourth level</a:t>
             </a:r>
           </a:p>
           <a:p>
             <a:pPr lvl="4"/>
             <a:r>
-              <a:rPr lang="en-US" smtClean="0"/>
+              <a:rPr lang="en-US"/>
               <a:t>Fifth level</a:t>
             </a:r>
-            <a:endParaRPr lang="en-US"/>
           </a:p>
         </p:txBody>
       </p:sp>
@@ -1664,7 +1688,7 @@
           <a:p>
             <a:pPr lvl="0"/>
             <a:r>
-              <a:rPr lang="en-US" smtClean="0"/>
+              <a:rPr lang="en-US"/>
               <a:t>Click to edit Master text styles</a:t>
             </a:r>
           </a:p>
@@ -1720,38 +1744,37 @@
           <a:p>
             <a:pPr lvl="0"/>
             <a:r>
-              <a:rPr lang="en-US" smtClean="0"/>
+              <a:rPr lang="en-US"/>
               <a:t>Click to edit Master text styles</a:t>
             </a:r>
           </a:p>
           <a:p>
             <a:pPr lvl="1"/>
             <a:r>
-              <a:rPr lang="en-US" smtClean="0"/>
+              <a:rPr lang="en-US"/>
               <a:t>Second level</a:t>
             </a:r>
           </a:p>
           <a:p>
             <a:pPr lvl="2"/>
             <a:r>
-              <a:rPr lang="en-US" smtClean="0"/>
+              <a:rPr lang="en-US"/>
               <a:t>Third level</a:t>
             </a:r>
           </a:p>
           <a:p>
             <a:pPr lvl="3"/>
             <a:r>
-              <a:rPr lang="en-US" smtClean="0"/>
+              <a:rPr lang="en-US"/>
               <a:t>Fourth level</a:t>
             </a:r>
           </a:p>
           <a:p>
             <a:pPr lvl="4"/>
             <a:r>
-              <a:rPr lang="en-US" smtClean="0"/>
+              <a:rPr lang="en-US"/>
               <a:t>Fifth level</a:t>
             </a:r>
-            <a:endParaRPr lang="en-US"/>
           </a:p>
         </p:txBody>
       </p:sp>
@@ -1773,7 +1796,7 @@
             <a:fld id="{1D8BD707-D9CF-40AE-B4C6-C98DA3205C09}" type="datetimeFigureOut">
               <a:rPr lang="en-US" smtClean="0"/>
               <a:pPr/>
-              <a:t>8/1/2011</a:t>
+              <a:t>4/2/2026</a:t>
             </a:fld>
             <a:endParaRPr lang="en-US"/>
           </a:p>
@@ -1863,10 +1886,9 @@
           <a:lstStyle/>
           <a:p>
             <a:r>
-              <a:rPr lang="en-US" smtClean="0"/>
+              <a:rPr lang="en-US"/>
               <a:t>Click to edit Master title style</a:t>
             </a:r>
-            <a:endParaRPr lang="en-US"/>
           </a:p>
         </p:txBody>
       </p:sp>
@@ -1888,7 +1910,7 @@
             <a:fld id="{1D8BD707-D9CF-40AE-B4C6-C98DA3205C09}" type="datetimeFigureOut">
               <a:rPr lang="en-US" smtClean="0"/>
               <a:pPr/>
-              <a:t>8/1/2011</a:t>
+              <a:t>4/2/2026</a:t>
             </a:fld>
             <a:endParaRPr lang="en-US"/>
           </a:p>
@@ -1980,7 +2002,7 @@
             <a:fld id="{1D8BD707-D9CF-40AE-B4C6-C98DA3205C09}" type="datetimeFigureOut">
               <a:rPr lang="en-US" smtClean="0"/>
               <a:pPr/>
-              <a:t>8/1/2011</a:t>
+              <a:t>4/2/2026</a:t>
             </a:fld>
             <a:endParaRPr lang="en-US"/>
           </a:p>
@@ -2079,10 +2101,9 @@
           </a:lstStyle>
           <a:p>
             <a:r>
-              <a:rPr lang="en-US" smtClean="0"/>
+              <a:rPr lang="en-US"/>
               <a:t>Click to edit Master title style</a:t>
             </a:r>
-            <a:endParaRPr lang="en-US"/>
           </a:p>
         </p:txBody>
       </p:sp>
@@ -2136,38 +2157,37 @@
           <a:p>
             <a:pPr lvl="0"/>
             <a:r>
-              <a:rPr lang="en-US" smtClean="0"/>
+              <a:rPr lang="en-US"/>
               <a:t>Click to edit Master text styles</a:t>
             </a:r>
           </a:p>
           <a:p>
             <a:pPr lvl="1"/>
             <a:r>
-              <a:rPr lang="en-US" smtClean="0"/>
+              <a:rPr lang="en-US"/>
               <a:t>Second level</a:t>
             </a:r>
           </a:p>
           <a:p>
             <a:pPr lvl="2"/>
             <a:r>
-              <a:rPr lang="en-US" smtClean="0"/>
+              <a:rPr lang="en-US"/>
               <a:t>Third level</a:t>
             </a:r>
           </a:p>
           <a:p>
             <a:pPr lvl="3"/>
             <a:r>
-              <a:rPr lang="en-US" smtClean="0"/>
+              <a:rPr lang="en-US"/>
               <a:t>Fourth level</a:t>
             </a:r>
           </a:p>
           <a:p>
             <a:pPr lvl="4"/>
             <a:r>
-              <a:rPr lang="en-US" smtClean="0"/>
+              <a:rPr lang="en-US"/>
               <a:t>Fifth level</a:t>
             </a:r>
-            <a:endParaRPr lang="en-US"/>
           </a:p>
         </p:txBody>
       </p:sp>
@@ -2230,7 +2250,7 @@
           <a:p>
             <a:pPr lvl="0"/>
             <a:r>
-              <a:rPr lang="en-US" smtClean="0"/>
+              <a:rPr lang="en-US"/>
               <a:t>Click to edit Master text styles</a:t>
             </a:r>
           </a:p>
@@ -2254,7 +2274,7 @@
             <a:fld id="{1D8BD707-D9CF-40AE-B4C6-C98DA3205C09}" type="datetimeFigureOut">
               <a:rPr lang="en-US" smtClean="0"/>
               <a:pPr/>
-              <a:t>8/1/2011</a:t>
+              <a:t>4/2/2026</a:t>
             </a:fld>
             <a:endParaRPr lang="en-US"/>
           </a:p>
@@ -2353,10 +2373,9 @@
           </a:lstStyle>
           <a:p>
             <a:r>
-              <a:rPr lang="en-US" smtClean="0"/>
+              <a:rPr lang="en-US"/>
               <a:t>Click to edit Master title style</a:t>
             </a:r>
-            <a:endParaRPr lang="en-US"/>
           </a:p>
         </p:txBody>
       </p:sp>
@@ -2480,7 +2499,7 @@
           <a:p>
             <a:pPr lvl="0"/>
             <a:r>
-              <a:rPr lang="en-US" smtClean="0"/>
+              <a:rPr lang="en-US"/>
               <a:t>Click to edit Master text styles</a:t>
             </a:r>
           </a:p>
@@ -2504,7 +2523,7 @@
             <a:fld id="{1D8BD707-D9CF-40AE-B4C6-C98DA3205C09}" type="datetimeFigureOut">
               <a:rPr lang="en-US" smtClean="0"/>
               <a:pPr/>
-              <a:t>8/1/2011</a:t>
+              <a:t>4/2/2026</a:t>
             </a:fld>
             <a:endParaRPr lang="en-US"/>
           </a:p>
@@ -2609,10 +2628,9 @@
           <a:lstStyle/>
           <a:p>
             <a:r>
-              <a:rPr lang="en-US" smtClean="0"/>
+              <a:rPr lang="en-US"/>
               <a:t>Click to edit Master title style</a:t>
             </a:r>
-            <a:endParaRPr lang="en-US"/>
           </a:p>
         </p:txBody>
       </p:sp>
@@ -2643,38 +2661,37 @@
           <a:p>
             <a:pPr lvl="0"/>
             <a:r>
-              <a:rPr lang="en-US" smtClean="0"/>
+              <a:rPr lang="en-US"/>
               <a:t>Click to edit Master text styles</a:t>
             </a:r>
           </a:p>
           <a:p>
             <a:pPr lvl="1"/>
             <a:r>
-              <a:rPr lang="en-US" smtClean="0"/>
+              <a:rPr lang="en-US"/>
               <a:t>Second level</a:t>
             </a:r>
           </a:p>
           <a:p>
             <a:pPr lvl="2"/>
             <a:r>
-              <a:rPr lang="en-US" smtClean="0"/>
+              <a:rPr lang="en-US"/>
               <a:t>Third level</a:t>
             </a:r>
           </a:p>
           <a:p>
             <a:pPr lvl="3"/>
             <a:r>
-              <a:rPr lang="en-US" smtClean="0"/>
+              <a:rPr lang="en-US"/>
               <a:t>Fourth level</a:t>
             </a:r>
           </a:p>
           <a:p>
             <a:pPr lvl="4"/>
             <a:r>
-              <a:rPr lang="en-US" smtClean="0"/>
+              <a:rPr lang="en-US"/>
               <a:t>Fifth level</a:t>
             </a:r>
-            <a:endParaRPr lang="en-US"/>
           </a:p>
         </p:txBody>
       </p:sp>
@@ -2714,7 +2731,7 @@
             <a:fld id="{1D8BD707-D9CF-40AE-B4C6-C98DA3205C09}" type="datetimeFigureOut">
               <a:rPr lang="en-US" smtClean="0"/>
               <a:pPr/>
-              <a:t>8/1/2011</a:t>
+              <a:t>4/2/2026</a:t>
             </a:fld>
             <a:endParaRPr lang="en-US"/>
           </a:p>
@@ -3069,7 +3086,7 @@
 </file>
 
 <file path=ppt/slides/slide1.xml><?xml version="1.0" encoding="utf-8"?>
-<p:sld xmlns:p="http://schemas.openxmlformats.org/presentationml/2006/main" xmlns:a="http://schemas.openxmlformats.org/drawingml/2006/main" xmlns:r="http://schemas.openxmlformats.org/officeDocument/2006/relationships">
+<p:sld xmlns:a="http://schemas.openxmlformats.org/drawingml/2006/main" xmlns:r="http://schemas.openxmlformats.org/officeDocument/2006/relationships" xmlns:p="http://schemas.openxmlformats.org/presentationml/2006/main">
   <p:cSld>
     <p:spTree>
       <p:nvGrpSpPr>
@@ -3087,14 +3104,14 @@
       </p:grpSpPr>
       <p:grpSp>
         <p:nvGrpSpPr>
-          <p:cNvPr name="Group 2" id="2"/>
+          <p:cNvPr id="2" name="Group 2"/>
           <p:cNvGrpSpPr>
-            <a:grpSpLocks noChangeAspect="true"/>
+            <a:grpSpLocks noChangeAspect="1"/>
           </p:cNvGrpSpPr>
           <p:nvPr/>
         </p:nvGrpSpPr>
         <p:grpSpPr>
-          <a:xfrm rot="0">
+          <a:xfrm>
             <a:off x="457200" y="457200"/>
             <a:ext cx="9779003" cy="952500"/>
             <a:chOff x="0" y="0"/>
@@ -3103,12 +3120,12 @@
         </p:grpSpPr>
         <p:sp>
           <p:nvSpPr>
-            <p:cNvPr name="Freeform 3" id="3"/>
+            <p:cNvPr id="3" name="Freeform 3"/>
             <p:cNvSpPr/>
             <p:nvPr/>
           </p:nvSpPr>
           <p:spPr>
-            <a:xfrm flipH="false" flipV="false" rot="0">
+            <a:xfrm>
               <a:off x="0" y="0"/>
               <a:ext cx="9779000" cy="952500"/>
             </a:xfrm>
@@ -3117,9 +3134,9 @@
               <a:gdLst/>
               <a:ahLst/>
               <a:cxnLst/>
-              <a:rect r="r" b="b" t="t" l="l"/>
+              <a:rect l="l" t="t" r="r" b="b"/>
               <a:pathLst>
-                <a:path h="952500" w="9779000">
+                <a:path w="9779000" h="952500">
                   <a:moveTo>
                     <a:pt x="0" y="952500"/>
                   </a:moveTo>
@@ -3144,12 +3161,12 @@
       </p:grpSp>
       <p:sp>
         <p:nvSpPr>
-          <p:cNvPr name="Freeform 4" id="4"/>
+          <p:cNvPr id="4" name="Freeform 4"/>
           <p:cNvSpPr/>
           <p:nvPr/>
         </p:nvSpPr>
         <p:spPr>
-          <a:xfrm flipH="false" flipV="false" rot="0">
+          <a:xfrm>
             <a:off x="393697" y="2958651"/>
             <a:ext cx="9906000" cy="6047356"/>
           </a:xfrm>
@@ -3158,9 +3175,9 @@
             <a:gdLst/>
             <a:ahLst/>
             <a:cxnLst/>
-            <a:rect r="r" b="b" t="t" l="l"/>
+            <a:rect l="l" t="t" r="r" b="b"/>
             <a:pathLst>
-              <a:path h="6047356" w="9906000">
+              <a:path w="9906000" h="6047356">
                 <a:moveTo>
                   <a:pt x="0" y="0"/>
                 </a:moveTo>
@@ -3189,19 +3206,26 @@
               </a:extLst>
             </a:blip>
             <a:stretch>
-              <a:fillRect l="0" t="0" r="0" b="0"/>
+              <a:fillRect/>
             </a:stretch>
           </a:blipFill>
         </p:spPr>
-      </p:sp>
-      <p:sp>
-        <p:nvSpPr>
-          <p:cNvPr name="Freeform 5" id="5"/>
+        <p:txBody>
+          <a:bodyPr/>
+          <a:lstStyle/>
+          <a:p>
+            <a:endParaRPr dirty="0"/>
+          </a:p>
+        </p:txBody>
+      </p:sp>
+      <p:sp>
+        <p:nvSpPr>
+          <p:cNvPr id="5" name="Freeform 5"/>
           <p:cNvSpPr/>
           <p:nvPr/>
         </p:nvSpPr>
         <p:spPr>
-          <a:xfrm flipH="false" flipV="false" rot="0">
+          <a:xfrm>
             <a:off x="3663953" y="348412"/>
             <a:ext cx="3333750" cy="1584703"/>
           </a:xfrm>
@@ -3210,9 +3234,9 @@
             <a:gdLst/>
             <a:ahLst/>
             <a:cxnLst/>
-            <a:rect r="r" b="b" t="t" l="l"/>
+            <a:rect l="l" t="t" r="r" b="b"/>
             <a:pathLst>
-              <a:path h="1584703" w="3333750">
+              <a:path w="3333750" h="1584703">
                 <a:moveTo>
                   <a:pt x="0" y="0"/>
                 </a:moveTo>
@@ -3235,19 +3259,26 @@
           <a:blipFill>
             <a:blip r:embed="rId4"/>
             <a:stretch>
-              <a:fillRect l="0" t="0" r="0" b="0"/>
+              <a:fillRect/>
             </a:stretch>
           </a:blipFill>
         </p:spPr>
-      </p:sp>
-      <p:sp>
-        <p:nvSpPr>
-          <p:cNvPr name="Freeform 6" id="6"/>
+        <p:txBody>
+          <a:bodyPr/>
+          <a:lstStyle/>
+          <a:p>
+            <a:endParaRPr/>
+          </a:p>
+        </p:txBody>
+      </p:sp>
+      <p:sp>
+        <p:nvSpPr>
+          <p:cNvPr id="6" name="Freeform 6"/>
           <p:cNvSpPr/>
           <p:nvPr/>
         </p:nvSpPr>
         <p:spPr>
-          <a:xfrm flipH="false" flipV="false" rot="0">
+          <a:xfrm>
             <a:off x="6902453" y="457200"/>
             <a:ext cx="3333750" cy="1357760"/>
           </a:xfrm>
@@ -3256,9 +3287,9 @@
             <a:gdLst/>
             <a:ahLst/>
             <a:cxnLst/>
-            <a:rect r="r" b="b" t="t" l="l"/>
+            <a:rect l="l" t="t" r="r" b="b"/>
             <a:pathLst>
-              <a:path h="1357760" w="3333750">
+              <a:path w="3333750" h="1357760">
                 <a:moveTo>
                   <a:pt x="0" y="0"/>
                 </a:moveTo>
@@ -3281,19 +3312,26 @@
           <a:blipFill>
             <a:blip r:embed="rId5"/>
             <a:stretch>
-              <a:fillRect l="0" t="0" r="0" b="0"/>
+              <a:fillRect/>
             </a:stretch>
           </a:blipFill>
         </p:spPr>
-      </p:sp>
-      <p:sp>
-        <p:nvSpPr>
-          <p:cNvPr name="Freeform 7" id="7"/>
+        <p:txBody>
+          <a:bodyPr/>
+          <a:lstStyle/>
+          <a:p>
+            <a:endParaRPr/>
+          </a:p>
+        </p:txBody>
+      </p:sp>
+      <p:sp>
+        <p:nvSpPr>
+          <p:cNvPr id="7" name="Freeform 7"/>
           <p:cNvSpPr/>
           <p:nvPr/>
         </p:nvSpPr>
         <p:spPr>
-          <a:xfrm flipH="false" flipV="false" rot="0">
+          <a:xfrm>
             <a:off x="457200" y="457200"/>
             <a:ext cx="1905000" cy="840867"/>
           </a:xfrm>
@@ -3302,9 +3340,9 @@
             <a:gdLst/>
             <a:ahLst/>
             <a:cxnLst/>
-            <a:rect r="r" b="b" t="t" l="l"/>
+            <a:rect l="l" t="t" r="r" b="b"/>
             <a:pathLst>
-              <a:path h="840867" w="1905000">
+              <a:path w="1905000" h="840867">
                 <a:moveTo>
                   <a:pt x="0" y="0"/>
                 </a:moveTo>
@@ -3327,21 +3365,28 @@
           <a:blipFill>
             <a:blip r:embed="rId6"/>
             <a:stretch>
-              <a:fillRect l="0" t="0" r="0" b="0"/>
+              <a:fillRect/>
             </a:stretch>
           </a:blipFill>
         </p:spPr>
+        <p:txBody>
+          <a:bodyPr/>
+          <a:lstStyle/>
+          <a:p>
+            <a:endParaRPr/>
+          </a:p>
+        </p:txBody>
       </p:sp>
       <p:grpSp>
         <p:nvGrpSpPr>
-          <p:cNvPr name="Group 8" id="8"/>
+          <p:cNvPr id="8" name="Group 8"/>
           <p:cNvGrpSpPr>
-            <a:grpSpLocks noChangeAspect="true"/>
+            <a:grpSpLocks noChangeAspect="1"/>
           </p:cNvGrpSpPr>
           <p:nvPr/>
         </p:nvGrpSpPr>
         <p:grpSpPr>
-          <a:xfrm rot="0">
+          <a:xfrm>
             <a:off x="5521328" y="9167879"/>
             <a:ext cx="19050" cy="2570226"/>
             <a:chOff x="0" y="0"/>
@@ -3350,12 +3395,12 @@
         </p:grpSpPr>
         <p:sp>
           <p:nvSpPr>
-            <p:cNvPr name="Freeform 9" id="9"/>
+            <p:cNvPr id="9" name="Freeform 9"/>
             <p:cNvSpPr/>
             <p:nvPr/>
           </p:nvSpPr>
           <p:spPr>
-            <a:xfrm flipH="false" flipV="false" rot="0">
+            <a:xfrm>
               <a:off x="0" y="0"/>
               <a:ext cx="19050" cy="2570226"/>
             </a:xfrm>
@@ -3364,9 +3409,9 @@
               <a:gdLst/>
               <a:ahLst/>
               <a:cxnLst/>
-              <a:rect r="r" b="b" t="t" l="l"/>
+              <a:rect l="l" t="t" r="r" b="b"/>
               <a:pathLst>
-                <a:path h="2570226" w="19050">
+                <a:path w="19050" h="2570226">
                   <a:moveTo>
                     <a:pt x="0" y="0"/>
                   </a:moveTo>
@@ -3393,14 +3438,14 @@
       </p:grpSp>
       <p:grpSp>
         <p:nvGrpSpPr>
-          <p:cNvPr name="Group 10" id="10"/>
+          <p:cNvPr id="10" name="Group 10"/>
           <p:cNvGrpSpPr>
-            <a:grpSpLocks noChangeAspect="true"/>
+            <a:grpSpLocks noChangeAspect="1"/>
           </p:cNvGrpSpPr>
           <p:nvPr/>
         </p:nvGrpSpPr>
         <p:grpSpPr>
-          <a:xfrm rot="0">
+          <a:xfrm>
             <a:off x="2163823" y="9167879"/>
             <a:ext cx="1428750" cy="1428750"/>
             <a:chOff x="0" y="0"/>
@@ -3409,7 +3454,7 @@
         </p:grpSpPr>
         <p:sp>
           <p:nvSpPr>
-            <p:cNvPr name="Freeform 11" id="11">
+            <p:cNvPr id="11" name="Freeform 11">
               <a:extLst>
                 <a:ext uri="{C183D7F6-B498-43B3-948B-1728B52AA6E4}">
                   <adec:decorative xmlns:adec="http://schemas.microsoft.com/office/drawing/2017/decorative" val="1"/>
@@ -3420,7 +3465,7 @@
             <p:nvPr/>
           </p:nvSpPr>
           <p:spPr>
-            <a:xfrm flipH="false" flipV="false" rot="0">
+            <a:xfrm>
               <a:off x="0" y="0"/>
               <a:ext cx="1905000" cy="1905000"/>
             </a:xfrm>
@@ -3429,9 +3474,9 @@
               <a:gdLst/>
               <a:ahLst/>
               <a:cxnLst/>
-              <a:rect r="r" b="b" t="t" l="l"/>
+              <a:rect l="l" t="t" r="r" b="b"/>
               <a:pathLst>
-                <a:path h="1905000" w="1905000">
+                <a:path w="1905000" h="1905000">
                   <a:moveTo>
                     <a:pt x="127000" y="0"/>
                   </a:moveTo>
@@ -3471,7 +3516,7 @@
             <a:blipFill>
               <a:blip r:embed="rId7"/>
               <a:stretch>
-                <a:fillRect l="0" t="0" r="0" b="0"/>
+                <a:fillRect/>
               </a:stretch>
             </a:blipFill>
           </p:spPr>
@@ -3479,12 +3524,12 @@
       </p:grpSp>
       <p:sp>
         <p:nvSpPr>
-          <p:cNvPr name="Freeform 12" id="12"/>
+          <p:cNvPr id="12" name="Freeform 12"/>
           <p:cNvSpPr/>
           <p:nvPr/>
         </p:nvSpPr>
         <p:spPr>
-          <a:xfrm flipH="false" flipV="false" rot="0">
+          <a:xfrm>
             <a:off x="8331203" y="11738105"/>
             <a:ext cx="1905000" cy="902713"/>
           </a:xfrm>
@@ -3493,9 +3538,9 @@
             <a:gdLst/>
             <a:ahLst/>
             <a:cxnLst/>
-            <a:rect r="r" b="b" t="t" l="l"/>
+            <a:rect l="l" t="t" r="r" b="b"/>
             <a:pathLst>
-              <a:path h="902713" w="1905000">
+              <a:path w="1905000" h="902713">
                 <a:moveTo>
                   <a:pt x="0" y="0"/>
                 </a:moveTo>
@@ -3518,19 +3563,26 @@
           <a:blipFill>
             <a:blip r:embed="rId8"/>
             <a:stretch>
-              <a:fillRect l="0" t="0" r="0" b="0"/>
+              <a:fillRect/>
             </a:stretch>
           </a:blipFill>
         </p:spPr>
-      </p:sp>
-      <p:sp>
-        <p:nvSpPr>
-          <p:cNvPr name="TextBox 13" id="13"/>
-          <p:cNvSpPr txBox="true"/>
-          <p:nvPr/>
-        </p:nvSpPr>
-        <p:spPr>
-          <a:xfrm rot="0">
+        <p:txBody>
+          <a:bodyPr/>
+          <a:lstStyle/>
+          <a:p>
+            <a:endParaRPr/>
+          </a:p>
+        </p:txBody>
+      </p:sp>
+      <p:sp>
+        <p:nvSpPr>
+          <p:cNvPr id="13" name="TextBox 13"/>
+          <p:cNvSpPr txBox="1"/>
+          <p:nvPr/>
+        </p:nvSpPr>
+        <p:spPr>
+          <a:xfrm>
             <a:off x="4211831" y="1326642"/>
             <a:ext cx="2690622" cy="232991"/>
           </a:xfrm>
@@ -3539,7 +3591,7 @@
           </a:prstGeom>
         </p:spPr>
         <p:txBody>
-          <a:bodyPr anchor="t" rtlCol="false" tIns="0" lIns="0" bIns="0" rIns="0">
+          <a:bodyPr lIns="0" tIns="0" rIns="0" bIns="0" rtlCol="0" anchor="t">
             <a:spAutoFit/>
           </a:bodyPr>
           <a:lstStyle/>
@@ -3566,12 +3618,12 @@
       </p:sp>
       <p:sp>
         <p:nvSpPr>
-          <p:cNvPr name="TextBox 14" id="14"/>
-          <p:cNvSpPr txBox="true"/>
-          <p:nvPr/>
-        </p:nvSpPr>
-        <p:spPr>
-          <a:xfrm rot="0">
+          <p:cNvPr id="14" name="TextBox 14"/>
+          <p:cNvSpPr txBox="1"/>
+          <p:nvPr/>
+        </p:nvSpPr>
+        <p:spPr>
+          <a:xfrm>
             <a:off x="5346697" y="1605153"/>
             <a:ext cx="72866" cy="434797"/>
           </a:xfrm>
@@ -3580,7 +3632,7 @@
           </a:prstGeom>
         </p:spPr>
         <p:txBody>
-          <a:bodyPr anchor="t" rtlCol="false" tIns="0" lIns="0" bIns="0" rIns="0">
+          <a:bodyPr lIns="0" tIns="0" rIns="0" bIns="0" rtlCol="0" anchor="t">
             <a:spAutoFit/>
           </a:bodyPr>
           <a:lstStyle/>
@@ -3607,40 +3659,40 @@
       </p:sp>
       <p:sp>
         <p:nvSpPr>
-          <p:cNvPr name="TextBox 15" id="15"/>
-          <p:cNvSpPr txBox="true"/>
-          <p:nvPr/>
-        </p:nvSpPr>
-        <p:spPr>
-          <a:xfrm rot="0">
-            <a:off x="4241168" y="1885490"/>
-            <a:ext cx="2255358" cy="390525"/>
-          </a:xfrm>
-          <a:prstGeom prst="rect">
-            <a:avLst/>
-          </a:prstGeom>
-        </p:spPr>
-        <p:txBody>
-          <a:bodyPr anchor="t" rtlCol="false" tIns="0" lIns="0" bIns="0" rIns="0">
+          <p:cNvPr id="15" name="TextBox 15"/>
+          <p:cNvSpPr txBox="1"/>
+          <p:nvPr/>
+        </p:nvSpPr>
+        <p:spPr>
+          <a:xfrm>
+            <a:off x="3592573" y="2010601"/>
+            <a:ext cx="3640854" cy="364876"/>
+          </a:xfrm>
+          <a:prstGeom prst="rect">
+            <a:avLst/>
+          </a:prstGeom>
+        </p:spPr>
+        <p:txBody>
+          <a:bodyPr wrap="square" lIns="0" tIns="0" rIns="0" bIns="0" rtlCol="0" anchor="t">
             <a:spAutoFit/>
           </a:bodyPr>
           <a:lstStyle/>
           <a:p>
-            <a:pPr algn="ctr" rtl="true">
+            <a:pPr algn="ctr" rtl="1">
               <a:lnSpc>
                 <a:spcPts val="3149"/>
               </a:lnSpc>
             </a:pPr>
             <a:r>
-              <a:rPr lang="ar-EG" b="true" sz="2250">
+              <a:rPr lang="ar-EG" sz="2250" b="1">
                 <a:solidFill>
                   <a:srgbClr val="306DB5"/>
                 </a:solidFill>
-                <a:latin typeface="Noto Sans Arabic Bold"/>
-                <a:ea typeface="Noto Sans Arabic Bold"/>
-                <a:cs typeface="Noto Sans Arabic Bold"/>
+                <a:latin typeface="Segoe UI" panose="020B0502040204020203" pitchFamily="34" charset="0"/>
+                <a:ea typeface="Tahoma" panose="020B0604030504040204" pitchFamily="34" charset="0"/>
+                <a:cs typeface="Segoe UI" panose="020B0502040204020203" pitchFamily="34" charset="0"/>
                 <a:sym typeface="Noto Sans Arabic Bold"/>
-                <a:rtl val="true"/>
+                <a:rtl/>
               </a:rPr>
               <a:t>تقرير إجازة مرضية</a:t>
             </a:r>
@@ -3649,12 +3701,12 @@
       </p:sp>
       <p:sp>
         <p:nvSpPr>
-          <p:cNvPr name="TextBox 16" id="16"/>
-          <p:cNvSpPr txBox="true"/>
-          <p:nvPr/>
-        </p:nvSpPr>
-        <p:spPr>
-          <a:xfrm rot="0">
+          <p:cNvPr id="16" name="TextBox 16"/>
+          <p:cNvSpPr txBox="1"/>
+          <p:nvPr/>
+        </p:nvSpPr>
+        <p:spPr>
+          <a:xfrm>
             <a:off x="476250" y="5770893"/>
             <a:ext cx="2044969" cy="300990"/>
           </a:xfrm>
@@ -3663,7 +3715,7 @@
           </a:prstGeom>
         </p:spPr>
         <p:txBody>
-          <a:bodyPr anchor="t" rtlCol="false" tIns="0" lIns="0" bIns="0" rIns="0">
+          <a:bodyPr lIns="0" tIns="0" rIns="0" bIns="0" rtlCol="0" anchor="t">
             <a:spAutoFit/>
           </a:bodyPr>
           <a:lstStyle/>
@@ -3674,7 +3726,7 @@
               </a:lnSpc>
             </a:pPr>
             <a:r>
-              <a:rPr lang="en-US" b="true" sz="1649">
+              <a:rPr lang="en-US" sz="1649" b="1">
                 <a:solidFill>
                   <a:srgbClr val="366FB5"/>
                 </a:solidFill>
@@ -3690,12 +3742,12 @@
       </p:sp>
       <p:sp>
         <p:nvSpPr>
-          <p:cNvPr name="TextBox 17" id="17"/>
-          <p:cNvSpPr txBox="true"/>
-          <p:nvPr/>
-        </p:nvSpPr>
-        <p:spPr>
-          <a:xfrm rot="0">
+          <p:cNvPr id="17" name="TextBox 17"/>
+          <p:cNvSpPr txBox="1"/>
+          <p:nvPr/>
+        </p:nvSpPr>
+        <p:spPr>
+          <a:xfrm>
             <a:off x="476250" y="8519065"/>
             <a:ext cx="2044969" cy="274955"/>
           </a:xfrm>
@@ -3704,7 +3756,7 @@
           </a:prstGeom>
         </p:spPr>
         <p:txBody>
-          <a:bodyPr anchor="t" rtlCol="false" tIns="0" lIns="0" bIns="0" rIns="0">
+          <a:bodyPr lIns="0" tIns="0" rIns="0" bIns="0" rtlCol="0" anchor="t">
             <a:spAutoFit/>
           </a:bodyPr>
           <a:lstStyle/>
@@ -3715,7 +3767,7 @@
               </a:lnSpc>
             </a:pPr>
             <a:r>
-              <a:rPr lang="en-US" b="true" sz="1549">
+              <a:rPr lang="en-US" sz="1549" b="1">
                 <a:solidFill>
                   <a:srgbClr val="366FB5"/>
                 </a:solidFill>
@@ -3731,12 +3783,12 @@
       </p:sp>
       <p:sp>
         <p:nvSpPr>
-          <p:cNvPr name="TextBox 18" id="18"/>
-          <p:cNvSpPr txBox="true"/>
-          <p:nvPr/>
-        </p:nvSpPr>
-        <p:spPr>
-          <a:xfrm rot="0">
+          <p:cNvPr id="18" name="TextBox 18"/>
+          <p:cNvSpPr txBox="1"/>
+          <p:nvPr/>
+        </p:nvSpPr>
+        <p:spPr>
+          <a:xfrm>
             <a:off x="476250" y="3151280"/>
             <a:ext cx="2043025" cy="241935"/>
           </a:xfrm>
@@ -3745,7 +3797,7 @@
           </a:prstGeom>
         </p:spPr>
         <p:txBody>
-          <a:bodyPr anchor="t" rtlCol="false" tIns="0" lIns="0" bIns="0" rIns="0">
+          <a:bodyPr lIns="0" tIns="0" rIns="0" bIns="0" rtlCol="0" anchor="t">
             <a:spAutoFit/>
           </a:bodyPr>
           <a:lstStyle/>
@@ -3756,7 +3808,7 @@
               </a:lnSpc>
             </a:pPr>
             <a:r>
-              <a:rPr lang="en-US" b="true" sz="1350">
+              <a:rPr lang="en-US" sz="1350" b="1">
                 <a:solidFill>
                   <a:srgbClr val="366FB5"/>
                 </a:solidFill>
@@ -3772,12 +3824,12 @@
       </p:sp>
       <p:sp>
         <p:nvSpPr>
-          <p:cNvPr name="TextBox 19" id="19"/>
-          <p:cNvSpPr txBox="true"/>
-          <p:nvPr/>
-        </p:nvSpPr>
-        <p:spPr>
-          <a:xfrm rot="0">
+          <p:cNvPr id="19" name="TextBox 19"/>
+          <p:cNvSpPr txBox="1"/>
+          <p:nvPr/>
+        </p:nvSpPr>
+        <p:spPr>
+          <a:xfrm>
             <a:off x="476250" y="7419746"/>
             <a:ext cx="2044969" cy="274955"/>
           </a:xfrm>
@@ -3786,7 +3838,7 @@
           </a:prstGeom>
         </p:spPr>
         <p:txBody>
-          <a:bodyPr anchor="t" rtlCol="false" tIns="0" lIns="0" bIns="0" rIns="0">
+          <a:bodyPr lIns="0" tIns="0" rIns="0" bIns="0" rtlCol="0" anchor="t">
             <a:spAutoFit/>
           </a:bodyPr>
           <a:lstStyle/>
@@ -3797,7 +3849,7 @@
               </a:lnSpc>
             </a:pPr>
             <a:r>
-              <a:rPr lang="en-US" b="true" sz="1549">
+              <a:rPr lang="en-US" sz="1549" b="1">
                 <a:solidFill>
                   <a:srgbClr val="366FB5"/>
                 </a:solidFill>
@@ -3813,12 +3865,12 @@
       </p:sp>
       <p:sp>
         <p:nvSpPr>
-          <p:cNvPr name="TextBox 20" id="20"/>
-          <p:cNvSpPr txBox="true"/>
-          <p:nvPr/>
-        </p:nvSpPr>
-        <p:spPr>
-          <a:xfrm rot="0">
+          <p:cNvPr id="20" name="TextBox 20"/>
+          <p:cNvSpPr txBox="1"/>
+          <p:nvPr/>
+        </p:nvSpPr>
+        <p:spPr>
+          <a:xfrm>
             <a:off x="476250" y="5246884"/>
             <a:ext cx="2044969" cy="274955"/>
           </a:xfrm>
@@ -3827,7 +3879,7 @@
           </a:prstGeom>
         </p:spPr>
         <p:txBody>
-          <a:bodyPr anchor="t" rtlCol="false" tIns="0" lIns="0" bIns="0" rIns="0">
+          <a:bodyPr lIns="0" tIns="0" rIns="0" bIns="0" rtlCol="0" anchor="t">
             <a:spAutoFit/>
           </a:bodyPr>
           <a:lstStyle/>
@@ -3838,7 +3890,7 @@
               </a:lnSpc>
             </a:pPr>
             <a:r>
-              <a:rPr lang="en-US" b="true" sz="1549">
+              <a:rPr lang="en-US" sz="1549" b="1">
                 <a:solidFill>
                   <a:srgbClr val="366FB5"/>
                 </a:solidFill>
@@ -3854,12 +3906,12 @@
       </p:sp>
       <p:sp>
         <p:nvSpPr>
-          <p:cNvPr name="TextBox 21" id="21"/>
-          <p:cNvSpPr txBox="true"/>
-          <p:nvPr/>
-        </p:nvSpPr>
-        <p:spPr>
-          <a:xfrm rot="0">
+          <p:cNvPr id="21" name="TextBox 21"/>
+          <p:cNvSpPr txBox="1"/>
+          <p:nvPr/>
+        </p:nvSpPr>
+        <p:spPr>
+          <a:xfrm>
             <a:off x="476250" y="6886099"/>
             <a:ext cx="2044969" cy="274955"/>
           </a:xfrm>
@@ -3868,7 +3920,7 @@
           </a:prstGeom>
         </p:spPr>
         <p:txBody>
-          <a:bodyPr anchor="t" rtlCol="false" tIns="0" lIns="0" bIns="0" rIns="0">
+          <a:bodyPr lIns="0" tIns="0" rIns="0" bIns="0" rtlCol="0" anchor="t">
             <a:spAutoFit/>
           </a:bodyPr>
           <a:lstStyle/>
@@ -3879,7 +3931,7 @@
               </a:lnSpc>
             </a:pPr>
             <a:r>
-              <a:rPr lang="en-US" b="true" sz="1549">
+              <a:rPr lang="en-US" sz="1549" b="1">
                 <a:solidFill>
                   <a:srgbClr val="366FB5"/>
                 </a:solidFill>
@@ -3895,12 +3947,12 @@
       </p:sp>
       <p:sp>
         <p:nvSpPr>
-          <p:cNvPr name="TextBox 22" id="22"/>
-          <p:cNvSpPr txBox="true"/>
-          <p:nvPr/>
-        </p:nvSpPr>
-        <p:spPr>
-          <a:xfrm rot="0">
+          <p:cNvPr id="22" name="TextBox 22"/>
+          <p:cNvSpPr txBox="1"/>
+          <p:nvPr/>
+        </p:nvSpPr>
+        <p:spPr>
+          <a:xfrm>
             <a:off x="457200" y="3694328"/>
             <a:ext cx="2062075" cy="241935"/>
           </a:xfrm>
@@ -3909,7 +3961,7 @@
           </a:prstGeom>
         </p:spPr>
         <p:txBody>
-          <a:bodyPr anchor="t" rtlCol="false" tIns="0" lIns="0" bIns="0" rIns="0">
+          <a:bodyPr lIns="0" tIns="0" rIns="0" bIns="0" rtlCol="0" anchor="t">
             <a:spAutoFit/>
           </a:bodyPr>
           <a:lstStyle/>
@@ -3920,7 +3972,7 @@
               </a:lnSpc>
             </a:pPr>
             <a:r>
-              <a:rPr lang="en-US" b="true" sz="1350">
+              <a:rPr lang="en-US" sz="1350" b="1">
                 <a:solidFill>
                   <a:srgbClr val="FFFFFF"/>
                 </a:solidFill>
@@ -3936,12 +3988,12 @@
       </p:sp>
       <p:sp>
         <p:nvSpPr>
-          <p:cNvPr name="TextBox 23" id="23"/>
-          <p:cNvSpPr txBox="true"/>
-          <p:nvPr/>
-        </p:nvSpPr>
-        <p:spPr>
-          <a:xfrm rot="0">
+          <p:cNvPr id="23" name="TextBox 23"/>
+          <p:cNvSpPr txBox="1"/>
+          <p:nvPr/>
+        </p:nvSpPr>
+        <p:spPr>
+          <a:xfrm>
             <a:off x="476250" y="4713237"/>
             <a:ext cx="2044969" cy="274955"/>
           </a:xfrm>
@@ -3950,7 +4002,7 @@
           </a:prstGeom>
         </p:spPr>
         <p:txBody>
-          <a:bodyPr anchor="t" rtlCol="false" tIns="0" lIns="0" bIns="0" rIns="0">
+          <a:bodyPr lIns="0" tIns="0" rIns="0" bIns="0" rtlCol="0" anchor="t">
             <a:spAutoFit/>
           </a:bodyPr>
           <a:lstStyle/>
@@ -3961,7 +4013,7 @@
               </a:lnSpc>
             </a:pPr>
             <a:r>
-              <a:rPr lang="en-US" b="true" sz="1549">
+              <a:rPr lang="en-US" sz="1549" b="1">
                 <a:solidFill>
                   <a:srgbClr val="366FB5"/>
                 </a:solidFill>
@@ -3977,12 +4029,12 @@
       </p:sp>
       <p:sp>
         <p:nvSpPr>
-          <p:cNvPr name="TextBox 24" id="24"/>
-          <p:cNvSpPr txBox="true"/>
-          <p:nvPr/>
-        </p:nvSpPr>
-        <p:spPr>
-          <a:xfrm rot="0">
+          <p:cNvPr id="24" name="TextBox 24"/>
+          <p:cNvSpPr txBox="1"/>
+          <p:nvPr/>
+        </p:nvSpPr>
+        <p:spPr>
+          <a:xfrm>
             <a:off x="476250" y="4187069"/>
             <a:ext cx="2044969" cy="274955"/>
           </a:xfrm>
@@ -3991,7 +4043,7 @@
           </a:prstGeom>
         </p:spPr>
         <p:txBody>
-          <a:bodyPr anchor="t" rtlCol="false" tIns="0" lIns="0" bIns="0" rIns="0">
+          <a:bodyPr lIns="0" tIns="0" rIns="0" bIns="0" rtlCol="0" anchor="t">
             <a:spAutoFit/>
           </a:bodyPr>
           <a:lstStyle/>
@@ -4002,7 +4054,7 @@
               </a:lnSpc>
             </a:pPr>
             <a:r>
-              <a:rPr lang="en-US" b="true" sz="1549">
+              <a:rPr lang="en-US" sz="1549" b="1">
                 <a:solidFill>
                   <a:srgbClr val="366FB5"/>
                 </a:solidFill>
@@ -4018,12 +4070,12 @@
       </p:sp>
       <p:sp>
         <p:nvSpPr>
-          <p:cNvPr name="TextBox 25" id="25"/>
-          <p:cNvSpPr txBox="true"/>
-          <p:nvPr/>
-        </p:nvSpPr>
-        <p:spPr>
-          <a:xfrm rot="0">
+          <p:cNvPr id="25" name="TextBox 25"/>
+          <p:cNvSpPr txBox="1"/>
+          <p:nvPr/>
+        </p:nvSpPr>
+        <p:spPr>
+          <a:xfrm>
             <a:off x="476250" y="7969406"/>
             <a:ext cx="2044969" cy="274955"/>
           </a:xfrm>
@@ -4032,7 +4084,7 @@
           </a:prstGeom>
         </p:spPr>
         <p:txBody>
-          <a:bodyPr anchor="t" rtlCol="false" tIns="0" lIns="0" bIns="0" rIns="0">
+          <a:bodyPr lIns="0" tIns="0" rIns="0" bIns="0" rtlCol="0" anchor="t">
             <a:spAutoFit/>
           </a:bodyPr>
           <a:lstStyle/>
@@ -4043,7 +4095,7 @@
               </a:lnSpc>
             </a:pPr>
             <a:r>
-              <a:rPr lang="en-US" b="true" sz="1549">
+              <a:rPr lang="en-US" sz="1549" b="1">
                 <a:solidFill>
                   <a:srgbClr val="366FB5"/>
                 </a:solidFill>
@@ -4059,12 +4111,12 @@
       </p:sp>
       <p:sp>
         <p:nvSpPr>
-          <p:cNvPr name="TextBox 26" id="26"/>
-          <p:cNvSpPr txBox="true"/>
-          <p:nvPr/>
-        </p:nvSpPr>
-        <p:spPr>
-          <a:xfrm rot="0">
+          <p:cNvPr id="26" name="TextBox 26"/>
+          <p:cNvSpPr txBox="1"/>
+          <p:nvPr/>
+        </p:nvSpPr>
+        <p:spPr>
+          <a:xfrm>
             <a:off x="476250" y="6352565"/>
             <a:ext cx="2044969" cy="274955"/>
           </a:xfrm>
@@ -4073,7 +4125,7 @@
           </a:prstGeom>
         </p:spPr>
         <p:txBody>
-          <a:bodyPr anchor="t" rtlCol="false" tIns="0" lIns="0" bIns="0" rIns="0">
+          <a:bodyPr lIns="0" tIns="0" rIns="0" bIns="0" rtlCol="0" anchor="t">
             <a:spAutoFit/>
           </a:bodyPr>
           <a:lstStyle/>
@@ -4084,7 +4136,7 @@
               </a:lnSpc>
             </a:pPr>
             <a:r>
-              <a:rPr lang="en-US" b="true" sz="1549">
+              <a:rPr lang="en-US" sz="1549" b="1">
                 <a:solidFill>
                   <a:srgbClr val="366FB5"/>
                 </a:solidFill>
@@ -4100,12 +4152,12 @@
       </p:sp>
       <p:sp>
         <p:nvSpPr>
-          <p:cNvPr name="TextBox 27" id="27"/>
-          <p:cNvSpPr txBox="true"/>
-          <p:nvPr/>
-        </p:nvSpPr>
-        <p:spPr>
-          <a:xfrm rot="0">
+          <p:cNvPr id="27" name="TextBox 27"/>
+          <p:cNvSpPr txBox="1"/>
+          <p:nvPr/>
+        </p:nvSpPr>
+        <p:spPr>
+          <a:xfrm>
             <a:off x="2521219" y="4233177"/>
             <a:ext cx="3117533" cy="232410"/>
           </a:xfrm>
@@ -4114,7 +4166,7 @@
           </a:prstGeom>
         </p:spPr>
         <p:txBody>
-          <a:bodyPr anchor="t" rtlCol="false" tIns="0" lIns="0" bIns="0" rIns="0">
+          <a:bodyPr lIns="0" tIns="0" rIns="0" bIns="0" rtlCol="0" anchor="t">
             <a:spAutoFit/>
           </a:bodyPr>
           <a:lstStyle/>
@@ -4125,7 +4177,7 @@
               </a:lnSpc>
             </a:pPr>
             <a:r>
-              <a:rPr lang="en-US" sz="1350" spc="-4">
+              <a:rPr lang="en-US" sz="1350" spc="-4" dirty="0">
                 <a:solidFill>
                   <a:srgbClr val="2C3E77"/>
                 </a:solidFill>
@@ -4141,12 +4193,12 @@
       </p:sp>
       <p:sp>
         <p:nvSpPr>
-          <p:cNvPr name="TextBox 28" id="28"/>
-          <p:cNvSpPr txBox="true"/>
-          <p:nvPr/>
-        </p:nvSpPr>
-        <p:spPr>
-          <a:xfrm rot="0">
+          <p:cNvPr id="28" name="TextBox 28"/>
+          <p:cNvSpPr txBox="1"/>
+          <p:nvPr/>
+        </p:nvSpPr>
+        <p:spPr>
+          <a:xfrm>
             <a:off x="2521219" y="4766824"/>
             <a:ext cx="3117533" cy="232410"/>
           </a:xfrm>
@@ -4155,7 +4207,7 @@
           </a:prstGeom>
         </p:spPr>
         <p:txBody>
-          <a:bodyPr anchor="t" rtlCol="false" tIns="0" lIns="0" bIns="0" rIns="0">
+          <a:bodyPr lIns="0" tIns="0" rIns="0" bIns="0" rtlCol="0" anchor="t">
             <a:spAutoFit/>
           </a:bodyPr>
           <a:lstStyle/>
@@ -4166,7 +4218,7 @@
               </a:lnSpc>
             </a:pPr>
             <a:r>
-              <a:rPr lang="en-US" sz="1350" spc="-4">
+              <a:rPr lang="en-US" sz="1350" spc="-4" dirty="0">
                 <a:solidFill>
                   <a:srgbClr val="2C3E77"/>
                 </a:solidFill>
@@ -4182,12 +4234,12 @@
       </p:sp>
       <p:sp>
         <p:nvSpPr>
-          <p:cNvPr name="TextBox 29" id="29"/>
-          <p:cNvSpPr txBox="true"/>
-          <p:nvPr/>
-        </p:nvSpPr>
-        <p:spPr>
-          <a:xfrm rot="0">
+          <p:cNvPr id="29" name="TextBox 29"/>
+          <p:cNvSpPr txBox="1"/>
+          <p:nvPr/>
+        </p:nvSpPr>
+        <p:spPr>
+          <a:xfrm>
             <a:off x="2519275" y="3690118"/>
             <a:ext cx="377140" cy="1194435"/>
           </a:xfrm>
@@ -4196,7 +4248,7 @@
           </a:prstGeom>
         </p:spPr>
         <p:txBody>
-          <a:bodyPr anchor="t" rtlCol="false" tIns="0" lIns="0" bIns="0" rIns="0">
+          <a:bodyPr lIns="0" tIns="0" rIns="0" bIns="0" rtlCol="0" anchor="t">
             <a:spAutoFit/>
           </a:bodyPr>
           <a:lstStyle/>
@@ -4207,7 +4259,7 @@
               </a:lnSpc>
             </a:pPr>
             <a:r>
-              <a:rPr lang="en-US" sz="1350" spc="-4">
+              <a:rPr lang="en-US" sz="1350" spc="-4" dirty="0">
                 <a:solidFill>
                   <a:srgbClr val="FFFFFF"/>
                 </a:solidFill>
@@ -4223,12 +4275,12 @@
       </p:sp>
       <p:sp>
         <p:nvSpPr>
-          <p:cNvPr name="TextBox 30" id="30"/>
-          <p:cNvSpPr txBox="true"/>
-          <p:nvPr/>
-        </p:nvSpPr>
-        <p:spPr>
-          <a:xfrm rot="0">
+          <p:cNvPr id="30" name="TextBox 30"/>
+          <p:cNvSpPr txBox="1"/>
+          <p:nvPr/>
+        </p:nvSpPr>
+        <p:spPr>
+          <a:xfrm>
             <a:off x="3956428" y="7291711"/>
             <a:ext cx="174879" cy="447027"/>
           </a:xfrm>
@@ -4237,7 +4289,7 @@
           </a:prstGeom>
         </p:spPr>
         <p:txBody>
-          <a:bodyPr anchor="t" rtlCol="false" tIns="0" lIns="0" bIns="0" rIns="0">
+          <a:bodyPr lIns="0" tIns="0" rIns="0" bIns="0" rtlCol="0" anchor="t">
             <a:spAutoFit/>
           </a:bodyPr>
           <a:lstStyle/>
@@ -4264,32 +4316,28 @@
       </p:sp>
       <p:sp>
         <p:nvSpPr>
-          <p:cNvPr name="TextBox 31" id="31"/>
-          <p:cNvSpPr txBox="true"/>
-          <p:nvPr/>
-        </p:nvSpPr>
-        <p:spPr>
-          <a:xfrm rot="0">
-            <a:off x="2521219" y="8381505"/>
-            <a:ext cx="3023083" cy="386715"/>
-          </a:xfrm>
-          <a:prstGeom prst="rect">
-            <a:avLst/>
-          </a:prstGeom>
-        </p:spPr>
-        <p:txBody>
-          <a:bodyPr anchor="t" rtlCol="false" tIns="0" lIns="0" bIns="0" rIns="0">
-            <a:spAutoFit/>
+          <p:cNvPr id="31" name="TextBox 31"/>
+          <p:cNvSpPr txBox="1"/>
+          <p:nvPr/>
+        </p:nvSpPr>
+        <p:spPr>
+          <a:xfrm>
+            <a:off x="2530201" y="8404445"/>
+            <a:ext cx="3026516" cy="543017"/>
+          </a:xfrm>
+          <a:prstGeom prst="rect">
+            <a:avLst/>
+          </a:prstGeom>
+        </p:spPr>
+        <p:txBody>
+          <a:bodyPr lIns="0" tIns="0" rIns="0" bIns="0" rtlCol="0" anchor="ctr" anchorCtr="1">
+            <a:noAutofit/>
           </a:bodyPr>
           <a:lstStyle/>
           <a:p>
-            <a:pPr algn="ctr">
-              <a:lnSpc>
-                <a:spcPts val="3375"/>
-              </a:lnSpc>
-            </a:pPr>
-            <a:r>
-              <a:rPr lang="en-US" sz="1350" spc="-4">
+            <a:pPr algn="ctr"/>
+            <a:r>
+              <a:rPr lang="en-US" sz="1350" spc="-4" dirty="0">
                 <a:solidFill>
                   <a:srgbClr val="2C3E77"/>
                 </a:solidFill>
@@ -4305,22 +4353,22 @@
       </p:sp>
       <p:sp>
         <p:nvSpPr>
-          <p:cNvPr name="TextBox 32" id="32"/>
-          <p:cNvSpPr txBox="true"/>
-          <p:nvPr/>
-        </p:nvSpPr>
-        <p:spPr>
-          <a:xfrm rot="0">
-            <a:off x="2521219" y="5300358"/>
-            <a:ext cx="6048109" cy="232410"/>
-          </a:xfrm>
-          <a:prstGeom prst="rect">
-            <a:avLst/>
-          </a:prstGeom>
-        </p:spPr>
-        <p:txBody>
-          <a:bodyPr anchor="t" rtlCol="false" tIns="0" lIns="0" bIns="0" rIns="0">
-            <a:spAutoFit/>
+          <p:cNvPr id="32" name="TextBox 32"/>
+          <p:cNvSpPr txBox="1"/>
+          <p:nvPr/>
+        </p:nvSpPr>
+        <p:spPr>
+          <a:xfrm>
+            <a:off x="2519275" y="5171666"/>
+            <a:ext cx="6065540" cy="541839"/>
+          </a:xfrm>
+          <a:prstGeom prst="rect">
+            <a:avLst/>
+          </a:prstGeom>
+        </p:spPr>
+        <p:txBody>
+          <a:bodyPr lIns="0" tIns="0" rIns="0" bIns="0" rtlCol="0" anchor="ctr" anchorCtr="1">
+            <a:noAutofit/>
           </a:bodyPr>
           <a:lstStyle/>
           <a:p>
@@ -4330,7 +4378,7 @@
               </a:lnSpc>
             </a:pPr>
             <a:r>
-              <a:rPr lang="en-US" sz="1350" spc="-4">
+              <a:rPr lang="en-US" sz="1350" spc="-4" dirty="0">
                 <a:solidFill>
                   <a:srgbClr val="2C3E77"/>
                 </a:solidFill>
@@ -4346,21 +4394,21 @@
       </p:sp>
       <p:sp>
         <p:nvSpPr>
-          <p:cNvPr name="TextBox 33" id="33"/>
-          <p:cNvSpPr txBox="true"/>
-          <p:nvPr/>
-        </p:nvSpPr>
-        <p:spPr>
-          <a:xfrm rot="0">
-            <a:off x="2519275" y="6367405"/>
-            <a:ext cx="6050053" cy="232410"/>
-          </a:xfrm>
-          <a:prstGeom prst="rect">
-            <a:avLst/>
-          </a:prstGeom>
-        </p:spPr>
-        <p:txBody>
-          <a:bodyPr anchor="t" rtlCol="false" tIns="0" lIns="0" bIns="0" rIns="0">
+          <p:cNvPr id="34" name="TextBox 34"/>
+          <p:cNvSpPr txBox="1"/>
+          <p:nvPr/>
+        </p:nvSpPr>
+        <p:spPr>
+          <a:xfrm>
+            <a:off x="5874589" y="3713813"/>
+            <a:ext cx="917943" cy="480060"/>
+          </a:xfrm>
+          <a:prstGeom prst="rect">
+            <a:avLst/>
+          </a:prstGeom>
+        </p:spPr>
+        <p:txBody>
+          <a:bodyPr lIns="0" tIns="0" rIns="0" bIns="0" rtlCol="0" anchor="t">
             <a:spAutoFit/>
           </a:bodyPr>
           <a:lstStyle/>
@@ -4371,37 +4419,37 @@
               </a:lnSpc>
             </a:pPr>
             <a:r>
-              <a:rPr lang="en-US" sz="1350" spc="-4">
-                <a:solidFill>
-                  <a:srgbClr val="2C3E77"/>
-                </a:solidFill>
-                <a:latin typeface="Open Sans"/>
-                <a:ea typeface="Open Sans"/>
-                <a:cs typeface="Open Sans"/>
-                <a:sym typeface="Open Sans"/>
-              </a:rPr>
-              <a:t>{{ID_NUMBER}}</a:t>
-            </a:r>
-          </a:p>
-        </p:txBody>
-      </p:sp>
-      <p:sp>
-        <p:nvSpPr>
-          <p:cNvPr name="TextBox 34" id="34"/>
-          <p:cNvSpPr txBox="true"/>
-          <p:nvPr/>
-        </p:nvSpPr>
-        <p:spPr>
-          <a:xfrm rot="0">
-            <a:off x="5871210" y="3696729"/>
-            <a:ext cx="917943" cy="480060"/>
-          </a:xfrm>
-          <a:prstGeom prst="rect">
-            <a:avLst/>
-          </a:prstGeom>
-        </p:spPr>
-        <p:txBody>
-          <a:bodyPr anchor="t" rtlCol="false" tIns="0" lIns="0" bIns="0" rIns="0">
+              <a:rPr lang="en-US" sz="1350" spc="-4" dirty="0">
+                <a:solidFill>
+                  <a:srgbClr val="FFFFFF"/>
+                </a:solidFill>
+                <a:latin typeface="Times New Roman"/>
+                <a:ea typeface="Times New Roman"/>
+                <a:cs typeface="Times New Roman"/>
+                <a:sym typeface="Times New Roman"/>
+              </a:rPr>
+              <a:t>{{EXIT_DATE_HIJRI}}</a:t>
+            </a:r>
+          </a:p>
+        </p:txBody>
+      </p:sp>
+      <p:sp>
+        <p:nvSpPr>
+          <p:cNvPr id="35" name="TextBox 35"/>
+          <p:cNvSpPr txBox="1"/>
+          <p:nvPr/>
+        </p:nvSpPr>
+        <p:spPr>
+          <a:xfrm>
+            <a:off x="5568953" y="4233177"/>
+            <a:ext cx="3076899" cy="232410"/>
+          </a:xfrm>
+          <a:prstGeom prst="rect">
+            <a:avLst/>
+          </a:prstGeom>
+        </p:spPr>
+        <p:txBody>
+          <a:bodyPr lIns="0" tIns="0" rIns="0" bIns="0" rtlCol="0" anchor="t">
             <a:spAutoFit/>
           </a:bodyPr>
           <a:lstStyle/>
@@ -4412,29 +4460,29 @@
               </a:lnSpc>
             </a:pPr>
             <a:r>
-              <a:rPr lang="en-US" sz="1350" spc="-4">
-                <a:solidFill>
-                  <a:srgbClr val="FFFFFF"/>
-                </a:solidFill>
-                <a:latin typeface="Times New Roman"/>
-                <a:ea typeface="Times New Roman"/>
-                <a:cs typeface="Times New Roman"/>
-                <a:sym typeface="Times New Roman"/>
-              </a:rPr>
-              <a:t>{{EXIT_DATE_HIJRI}}</a:t>
-            </a:r>
-          </a:p>
-        </p:txBody>
-      </p:sp>
-      <p:sp>
-        <p:nvSpPr>
-          <p:cNvPr name="TextBox 35" id="35"/>
-          <p:cNvSpPr txBox="true"/>
-          <p:nvPr/>
-        </p:nvSpPr>
-        <p:spPr>
-          <a:xfrm rot="0">
-            <a:off x="5568953" y="4233177"/>
+              <a:rPr lang="en-US" sz="1350" spc="-4" dirty="0">
+                <a:solidFill>
+                  <a:srgbClr val="2C3E77"/>
+                </a:solidFill>
+                <a:latin typeface="Open Sans"/>
+                <a:ea typeface="Open Sans"/>
+                <a:cs typeface="Open Sans"/>
+                <a:sym typeface="Open Sans"/>
+              </a:rPr>
+              <a:t>{{ENTRY_DATE_HIJRI}}</a:t>
+            </a:r>
+          </a:p>
+        </p:txBody>
+      </p:sp>
+      <p:sp>
+        <p:nvSpPr>
+          <p:cNvPr id="36" name="TextBox 36"/>
+          <p:cNvSpPr txBox="1"/>
+          <p:nvPr/>
+        </p:nvSpPr>
+        <p:spPr>
+          <a:xfrm>
+            <a:off x="5568953" y="4766824"/>
             <a:ext cx="3076899" cy="232410"/>
           </a:xfrm>
           <a:prstGeom prst="rect">
@@ -4442,7 +4490,7 @@
           </a:prstGeom>
         </p:spPr>
         <p:txBody>
-          <a:bodyPr anchor="t" rtlCol="false" tIns="0" lIns="0" bIns="0" rIns="0">
+          <a:bodyPr lIns="0" tIns="0" rIns="0" bIns="0" rtlCol="0" anchor="t">
             <a:spAutoFit/>
           </a:bodyPr>
           <a:lstStyle/>
@@ -4453,37 +4501,39 @@
               </a:lnSpc>
             </a:pPr>
             <a:r>
-              <a:rPr lang="en-US" sz="1350" spc="-4">
-                <a:solidFill>
-                  <a:srgbClr val="2C3E77"/>
+              <a:rPr lang="en-US" sz="1350" spc="-4" dirty="0">
+                <a:solidFill>
+                  <a:schemeClr val="tx2">
+                    <a:lumMod val="75000"/>
+                  </a:schemeClr>
                 </a:solidFill>
                 <a:latin typeface="Open Sans"/>
                 <a:ea typeface="Open Sans"/>
                 <a:cs typeface="Open Sans"/>
                 <a:sym typeface="Open Sans"/>
               </a:rPr>
-              <a:t>{{ENTRY_DATE_HIJRI}}</a:t>
-            </a:r>
-          </a:p>
-        </p:txBody>
-      </p:sp>
-      <p:sp>
-        <p:nvSpPr>
-          <p:cNvPr name="TextBox 36" id="36"/>
-          <p:cNvSpPr txBox="true"/>
-          <p:nvPr/>
-        </p:nvSpPr>
-        <p:spPr>
-          <a:xfrm rot="0">
-            <a:off x="5568953" y="4766824"/>
-            <a:ext cx="3076899" cy="232410"/>
-          </a:xfrm>
-          <a:prstGeom prst="rect">
-            <a:avLst/>
-          </a:prstGeom>
-        </p:spPr>
-        <p:txBody>
-          <a:bodyPr anchor="t" rtlCol="false" tIns="0" lIns="0" bIns="0" rIns="0">
+              <a:t>{{EXIT_DATE_HIJRI}}</a:t>
+            </a:r>
+          </a:p>
+        </p:txBody>
+      </p:sp>
+      <p:sp>
+        <p:nvSpPr>
+          <p:cNvPr id="37" name="TextBox 37"/>
+          <p:cNvSpPr txBox="1"/>
+          <p:nvPr/>
+        </p:nvSpPr>
+        <p:spPr>
+          <a:xfrm>
+            <a:off x="6986930" y="3708073"/>
+            <a:ext cx="855902" cy="718185"/>
+          </a:xfrm>
+          <a:prstGeom prst="rect">
+            <a:avLst/>
+          </a:prstGeom>
+        </p:spPr>
+        <p:txBody>
+          <a:bodyPr lIns="0" tIns="0" rIns="0" bIns="0" rtlCol="0" anchor="t">
             <a:spAutoFit/>
           </a:bodyPr>
           <a:lstStyle/>
@@ -4494,48 +4544,7 @@
               </a:lnSpc>
             </a:pPr>
             <a:r>
-              <a:rPr lang="en-US" sz="1350" spc="-4">
-                <a:solidFill>
-                  <a:srgbClr val="2C3E77"/>
-                </a:solidFill>
-                <a:latin typeface="Open Sans"/>
-                <a:ea typeface="Open Sans"/>
-                <a:cs typeface="Open Sans"/>
-                <a:sym typeface="Open Sans"/>
-              </a:rPr>
-              <a:t>{{EXIT_DATE_HIJRI}}</a:t>
-            </a:r>
-          </a:p>
-        </p:txBody>
-      </p:sp>
-      <p:sp>
-        <p:nvSpPr>
-          <p:cNvPr name="TextBox 37" id="37"/>
-          <p:cNvSpPr txBox="true"/>
-          <p:nvPr/>
-        </p:nvSpPr>
-        <p:spPr>
-          <a:xfrm rot="0">
-            <a:off x="6986930" y="3708073"/>
-            <a:ext cx="855902" cy="718185"/>
-          </a:xfrm>
-          <a:prstGeom prst="rect">
-            <a:avLst/>
-          </a:prstGeom>
-        </p:spPr>
-        <p:txBody>
-          <a:bodyPr anchor="t" rtlCol="false" tIns="0" lIns="0" bIns="0" rIns="0">
-            <a:spAutoFit/>
-          </a:bodyPr>
-          <a:lstStyle/>
-          <a:p>
-            <a:pPr algn="ctr">
-              <a:lnSpc>
-                <a:spcPts val="1889"/>
-              </a:lnSpc>
-            </a:pPr>
-            <a:r>
-              <a:rPr lang="en-US" sz="1350" spc="-4">
+              <a:rPr lang="en-US" sz="1350" spc="-4" dirty="0">
                 <a:solidFill>
                   <a:srgbClr val="FFFFFF"/>
                 </a:solidFill>
@@ -4551,13 +4560,13 @@
       </p:sp>
       <p:sp>
         <p:nvSpPr>
-          <p:cNvPr name="TextBox 38" id="38"/>
-          <p:cNvSpPr txBox="true"/>
-          <p:nvPr/>
-        </p:nvSpPr>
-        <p:spPr>
-          <a:xfrm rot="0">
-            <a:off x="8142351" y="3696729"/>
+          <p:cNvPr id="38" name="TextBox 38"/>
+          <p:cNvSpPr txBox="1"/>
+          <p:nvPr/>
+        </p:nvSpPr>
+        <p:spPr>
+          <a:xfrm>
+            <a:off x="8206596" y="3704816"/>
             <a:ext cx="435959" cy="956310"/>
           </a:xfrm>
           <a:prstGeom prst="rect">
@@ -4565,7 +4574,7 @@
           </a:prstGeom>
         </p:spPr>
         <p:txBody>
-          <a:bodyPr anchor="t" rtlCol="false" tIns="0" lIns="0" bIns="0" rIns="0">
+          <a:bodyPr lIns="0" tIns="0" rIns="0" bIns="0" rtlCol="0" anchor="t">
             <a:spAutoFit/>
           </a:bodyPr>
           <a:lstStyle/>
@@ -4576,7 +4585,7 @@
               </a:lnSpc>
             </a:pPr>
             <a:r>
-              <a:rPr lang="en-US" sz="1350" spc="-4">
+              <a:rPr lang="en-US" sz="1350" spc="-4" dirty="0">
                 <a:solidFill>
                   <a:srgbClr val="FFFFFF"/>
                 </a:solidFill>
@@ -4592,40 +4601,40 @@
       </p:sp>
       <p:sp>
         <p:nvSpPr>
-          <p:cNvPr name="TextBox 39" id="39"/>
-          <p:cNvSpPr txBox="true"/>
-          <p:nvPr/>
-        </p:nvSpPr>
-        <p:spPr>
-          <a:xfrm rot="0">
-            <a:off x="6771132" y="3697100"/>
-            <a:ext cx="215798" cy="232410"/>
-          </a:xfrm>
-          <a:prstGeom prst="rect">
-            <a:avLst/>
-          </a:prstGeom>
-        </p:spPr>
-        <p:txBody>
-          <a:bodyPr anchor="t" rtlCol="false" tIns="0" lIns="0" bIns="0" rIns="0">
+          <p:cNvPr id="39" name="TextBox 39"/>
+          <p:cNvSpPr txBox="1"/>
+          <p:nvPr/>
+        </p:nvSpPr>
+        <p:spPr>
+          <a:xfrm>
+            <a:off x="6767835" y="3720207"/>
+            <a:ext cx="215798" cy="243656"/>
+          </a:xfrm>
+          <a:prstGeom prst="rect">
+            <a:avLst/>
+          </a:prstGeom>
+        </p:spPr>
+        <p:txBody>
+          <a:bodyPr lIns="0" tIns="0" rIns="0" bIns="0" rtlCol="0" anchor="t">
             <a:spAutoFit/>
           </a:bodyPr>
           <a:lstStyle/>
           <a:p>
-            <a:pPr algn="l" rtl="true">
+            <a:pPr algn="l" rtl="1">
               <a:lnSpc>
                 <a:spcPts val="1889"/>
               </a:lnSpc>
             </a:pPr>
             <a:r>
-              <a:rPr lang="ar-EG" sz="1350">
+              <a:rPr lang="ar-EG" sz="1600">
                 <a:solidFill>
                   <a:srgbClr val="FFFFFF"/>
                 </a:solidFill>
                 <a:latin typeface="Noto Sans Arabic"/>
                 <a:ea typeface="Noto Sans Arabic"/>
-                <a:cs typeface="Noto Sans Arabic"/>
+                <a:cs typeface="+mj-cs"/>
                 <a:sym typeface="Noto Sans Arabic"/>
-                <a:rtl val="true"/>
+                <a:rtl/>
               </a:rPr>
               <a:t>الى</a:t>
             </a:r>
@@ -4634,40 +4643,40 @@
       </p:sp>
       <p:sp>
         <p:nvSpPr>
-          <p:cNvPr name="TextBox 40" id="40"/>
-          <p:cNvSpPr txBox="true"/>
-          <p:nvPr/>
-        </p:nvSpPr>
-        <p:spPr>
-          <a:xfrm rot="0">
+          <p:cNvPr id="40" name="TextBox 40"/>
+          <p:cNvSpPr txBox="1"/>
+          <p:nvPr/>
+        </p:nvSpPr>
+        <p:spPr>
+          <a:xfrm>
             <a:off x="5568953" y="7431919"/>
-            <a:ext cx="3000375" cy="232410"/>
-          </a:xfrm>
-          <a:prstGeom prst="rect">
-            <a:avLst/>
-          </a:prstGeom>
-        </p:spPr>
-        <p:txBody>
-          <a:bodyPr anchor="t" rtlCol="false" tIns="0" lIns="0" bIns="0" rIns="0">
+            <a:ext cx="3000375" cy="243656"/>
+          </a:xfrm>
+          <a:prstGeom prst="rect">
+            <a:avLst/>
+          </a:prstGeom>
+        </p:spPr>
+        <p:txBody>
+          <a:bodyPr lIns="0" tIns="0" rIns="0" bIns="0" rtlCol="0" anchor="t">
             <a:spAutoFit/>
           </a:bodyPr>
           <a:lstStyle/>
           <a:p>
-            <a:pPr algn="ctr" rtl="true">
+            <a:pPr algn="ctr" rtl="1">
               <a:lnSpc>
                 <a:spcPts val="1889"/>
               </a:lnSpc>
             </a:pPr>
             <a:r>
-              <a:rPr lang="ar-EG" sz="1350">
+              <a:rPr lang="ar-EG" sz="1600">
                 <a:solidFill>
                   <a:srgbClr val="2C3E77"/>
                 </a:solidFill>
-                <a:latin typeface="Noto Sans Arabic"/>
+                <a:latin typeface="Dubai" panose="020B0503030403030204" pitchFamily="34" charset="-78"/>
                 <a:ea typeface="Noto Sans Arabic"/>
-                <a:cs typeface="Noto Sans Arabic"/>
+                <a:cs typeface="Dubai" panose="020B0503030403030204" pitchFamily="34" charset="-78"/>
                 <a:sym typeface="Noto Sans Arabic"/>
-                <a:rtl val="true"/>
+                <a:rtl/>
               </a:rPr>
               <a:t>الى من يهمه الامر</a:t>
             </a:r>
@@ -4676,708 +4685,692 @@
       </p:sp>
       <p:sp>
         <p:nvSpPr>
-          <p:cNvPr name="TextBox 41" id="41"/>
-          <p:cNvSpPr txBox="true"/>
-          <p:nvPr/>
-        </p:nvSpPr>
-        <p:spPr>
-          <a:xfrm rot="0">
-            <a:off x="5568953" y="6928644"/>
-            <a:ext cx="3000375" cy="232410"/>
-          </a:xfrm>
-          <a:prstGeom prst="rect">
-            <a:avLst/>
-          </a:prstGeom>
-        </p:spPr>
-        <p:txBody>
-          <a:bodyPr anchor="t" rtlCol="false" tIns="0" lIns="0" bIns="0" rIns="0">
+          <p:cNvPr id="41" name="TextBox 41"/>
+          <p:cNvSpPr txBox="1"/>
+          <p:nvPr/>
+        </p:nvSpPr>
+        <p:spPr>
+          <a:xfrm>
+            <a:off x="5562267" y="6785519"/>
+            <a:ext cx="3022548" cy="521755"/>
+          </a:xfrm>
+          <a:prstGeom prst="rect">
+            <a:avLst/>
+          </a:prstGeom>
+        </p:spPr>
+        <p:txBody>
+          <a:bodyPr lIns="0" tIns="0" rIns="0" bIns="0" rtlCol="0" anchor="ctr" anchorCtr="1">
+            <a:noAutofit/>
+          </a:bodyPr>
+          <a:lstStyle/>
+          <a:p>
+            <a:pPr algn="ctr" rtl="1"/>
+            <a:r>
+              <a:rPr lang="en-US" sz="1600" dirty="0">
+                <a:solidFill>
+                  <a:srgbClr val="2C3E77"/>
+                </a:solidFill>
+                <a:latin typeface="Dubai" panose="020B0503030403030204" pitchFamily="34" charset="-78"/>
+                <a:ea typeface="Noto Sans Arabic"/>
+                <a:cs typeface="Dubai" panose="020B0503030403030204" pitchFamily="34" charset="-78"/>
+                <a:sym typeface="Noto Sans Arabic"/>
+              </a:rPr>
+              <a:t>{{NATIONALITY_AR}}</a:t>
+            </a:r>
+          </a:p>
+        </p:txBody>
+      </p:sp>
+      <p:sp>
+        <p:nvSpPr>
+          <p:cNvPr id="42" name="TextBox 42"/>
+          <p:cNvSpPr txBox="1"/>
+          <p:nvPr/>
+        </p:nvSpPr>
+        <p:spPr>
+          <a:xfrm>
+            <a:off x="5553284" y="8404445"/>
+            <a:ext cx="3029527" cy="538595"/>
+          </a:xfrm>
+          <a:prstGeom prst="rect">
+            <a:avLst/>
+          </a:prstGeom>
+        </p:spPr>
+        <p:txBody>
+          <a:bodyPr lIns="0" tIns="0" rIns="0" bIns="0" rtlCol="0" anchor="ctr" anchorCtr="1">
+            <a:noAutofit/>
+          </a:bodyPr>
+          <a:lstStyle/>
+          <a:p>
+            <a:pPr algn="ctr"/>
+            <a:r>
+              <a:rPr lang="en-US" sz="1600" dirty="0">
+                <a:solidFill>
+                  <a:srgbClr val="2C3E77"/>
+                </a:solidFill>
+                <a:latin typeface="Dubai" panose="020B0503030403030204" pitchFamily="34" charset="-78"/>
+                <a:ea typeface="Noto Sans Arabic"/>
+                <a:cs typeface="Dubai" panose="020B0503030403030204" pitchFamily="34" charset="-78"/>
+                <a:sym typeface="Noto Sans Arabic"/>
+              </a:rPr>
+              <a:t>{{JOB_TITLE_AR}}</a:t>
+            </a:r>
+          </a:p>
+        </p:txBody>
+      </p:sp>
+      <p:sp>
+        <p:nvSpPr>
+          <p:cNvPr id="43" name="TextBox 43"/>
+          <p:cNvSpPr txBox="1"/>
+          <p:nvPr/>
+        </p:nvSpPr>
+        <p:spPr>
+          <a:xfrm>
+            <a:off x="5554376" y="5703805"/>
+            <a:ext cx="3029528" cy="531455"/>
+          </a:xfrm>
+          <a:prstGeom prst="rect">
+            <a:avLst/>
+          </a:prstGeom>
+        </p:spPr>
+        <p:txBody>
+          <a:bodyPr wrap="square" lIns="0" tIns="0" rIns="0" bIns="0" rtlCol="0" anchor="ctr" anchorCtr="1">
+            <a:noAutofit/>
+          </a:bodyPr>
+          <a:lstStyle/>
+          <a:p>
+            <a:pPr algn="ctr"/>
+            <a:r>
+              <a:rPr lang="en-US" sz="1600" dirty="0">
+                <a:solidFill>
+                  <a:srgbClr val="2C3E77"/>
+                </a:solidFill>
+                <a:latin typeface="Dubai" panose="020B0603030403030204" pitchFamily="34" charset="-78"/>
+                <a:ea typeface="Microsoft GothicNeo" panose="020B0500000101010101" pitchFamily="34" charset="-127"/>
+                <a:cs typeface="Dubai" panose="020B0603030403030204" pitchFamily="34" charset="-78"/>
+                <a:sym typeface="Noto Sans Arabic"/>
+              </a:rPr>
+              <a:t>{{NAME_AR}}</a:t>
+            </a:r>
+          </a:p>
+        </p:txBody>
+      </p:sp>
+      <p:sp>
+        <p:nvSpPr>
+          <p:cNvPr id="44" name="TextBox 44"/>
+          <p:cNvSpPr txBox="1"/>
+          <p:nvPr/>
+        </p:nvSpPr>
+        <p:spPr>
+          <a:xfrm>
+            <a:off x="5562267" y="7846612"/>
+            <a:ext cx="3022548" cy="560933"/>
+          </a:xfrm>
+          <a:prstGeom prst="rect">
+            <a:avLst/>
+          </a:prstGeom>
+        </p:spPr>
+        <p:txBody>
+          <a:bodyPr lIns="0" tIns="0" rIns="0" bIns="0" rtlCol="0" anchor="ctr" anchorCtr="1">
+            <a:noAutofit/>
+          </a:bodyPr>
+          <a:lstStyle/>
+          <a:p>
+            <a:pPr algn="ctr"/>
+            <a:r>
+              <a:rPr lang="en-US" sz="1600" dirty="0">
+                <a:solidFill>
+                  <a:srgbClr val="2C3E77"/>
+                </a:solidFill>
+                <a:latin typeface="Dubai" panose="020B0503030403030204" pitchFamily="34" charset="-78"/>
+                <a:ea typeface="Noto Sans Arabic"/>
+                <a:cs typeface="Dubai" panose="020B0503030403030204" pitchFamily="34" charset="-78"/>
+                <a:sym typeface="Noto Sans Arabic"/>
+              </a:rPr>
+              <a:t>{{DOCTOR_NAME_AR}}</a:t>
+            </a:r>
+          </a:p>
+        </p:txBody>
+      </p:sp>
+      <p:sp>
+        <p:nvSpPr>
+          <p:cNvPr id="45" name="TextBox 45"/>
+          <p:cNvSpPr txBox="1"/>
+          <p:nvPr/>
+        </p:nvSpPr>
+        <p:spPr>
+          <a:xfrm>
+            <a:off x="7927209" y="3697100"/>
+            <a:ext cx="403993" cy="243656"/>
+          </a:xfrm>
+          <a:prstGeom prst="rect">
+            <a:avLst/>
+          </a:prstGeom>
+        </p:spPr>
+        <p:txBody>
+          <a:bodyPr wrap="square" lIns="0" tIns="0" rIns="0" bIns="0" rtlCol="0" anchor="t">
             <a:spAutoFit/>
           </a:bodyPr>
           <a:lstStyle/>
           <a:p>
-            <a:pPr algn="ctr">
+            <a:pPr algn="l" rtl="1">
               <a:lnSpc>
                 <a:spcPts val="1889"/>
               </a:lnSpc>
             </a:pPr>
             <a:r>
-              <a:rPr lang="en-US" sz="1350">
-                <a:solidFill>
-                  <a:srgbClr val="2C3E77"/>
-                </a:solidFill>
-                <a:latin typeface="Noto Sans Arabic"/>
-                <a:ea typeface="Noto Sans Arabic"/>
-                <a:cs typeface="Noto Sans Arabic"/>
+              <a:rPr lang="ar-EG" sz="1600">
+                <a:solidFill>
+                  <a:srgbClr val="FFFFFF"/>
+                </a:solidFill>
+                <a:latin typeface="Segoe UI" panose="020B0502040204020203" pitchFamily="34" charset="0"/>
+                <a:ea typeface="Tahoma" panose="020B0604030504040204" pitchFamily="34" charset="0"/>
+                <a:cs typeface="+mj-cs"/>
                 <a:sym typeface="Noto Sans Arabic"/>
-              </a:rPr>
-              <a:t>{{NATIONALITY_AR}}</a:t>
-            </a:r>
-          </a:p>
-        </p:txBody>
-      </p:sp>
-      <p:sp>
-        <p:nvSpPr>
-          <p:cNvPr name="TextBox 42" id="42"/>
-          <p:cNvSpPr txBox="true"/>
-          <p:nvPr/>
-        </p:nvSpPr>
-        <p:spPr>
-          <a:xfrm rot="0">
-            <a:off x="5568953" y="8531362"/>
-            <a:ext cx="3000375" cy="232410"/>
-          </a:xfrm>
-          <a:prstGeom prst="rect">
-            <a:avLst/>
-          </a:prstGeom>
-        </p:spPr>
-        <p:txBody>
-          <a:bodyPr anchor="t" rtlCol="false" tIns="0" lIns="0" bIns="0" rIns="0">
+                <a:rtl/>
+              </a:rPr>
+              <a:t>يوم</a:t>
+            </a:r>
+          </a:p>
+        </p:txBody>
+      </p:sp>
+      <p:sp>
+        <p:nvSpPr>
+          <p:cNvPr id="46" name="TextBox 46"/>
+          <p:cNvSpPr txBox="1"/>
+          <p:nvPr/>
+        </p:nvSpPr>
+        <p:spPr>
+          <a:xfrm>
+            <a:off x="8578310" y="5838711"/>
+            <a:ext cx="1657893" cy="251992"/>
+          </a:xfrm>
+          <a:prstGeom prst="rect">
+            <a:avLst/>
+          </a:prstGeom>
+        </p:spPr>
+        <p:txBody>
+          <a:bodyPr lIns="0" tIns="0" rIns="0" bIns="0" rtlCol="0" anchor="t">
             <a:spAutoFit/>
           </a:bodyPr>
           <a:lstStyle/>
           <a:p>
-            <a:pPr algn="ctr">
+            <a:pPr algn="ctr" rtl="1">
               <a:lnSpc>
                 <a:spcPts val="1889"/>
               </a:lnSpc>
             </a:pPr>
             <a:r>
-              <a:rPr lang="en-US" sz="1350">
-                <a:solidFill>
-                  <a:srgbClr val="2C3E77"/>
-                </a:solidFill>
-                <a:latin typeface="Noto Sans Arabic"/>
-                <a:ea typeface="Noto Sans Arabic"/>
-                <a:cs typeface="Noto Sans Arabic"/>
-                <a:sym typeface="Noto Sans Arabic"/>
-              </a:rPr>
-              <a:t>{{JOB_TITLE_AR}}</a:t>
-            </a:r>
-          </a:p>
-        </p:txBody>
-      </p:sp>
-      <p:sp>
-        <p:nvSpPr>
-          <p:cNvPr name="TextBox 43" id="43"/>
-          <p:cNvSpPr txBox="true"/>
-          <p:nvPr/>
-        </p:nvSpPr>
-        <p:spPr>
-          <a:xfrm rot="0">
-            <a:off x="5564572" y="5868295"/>
-            <a:ext cx="3004756" cy="232410"/>
-          </a:xfrm>
-          <a:prstGeom prst="rect">
-            <a:avLst/>
-          </a:prstGeom>
-        </p:spPr>
-        <p:txBody>
-          <a:bodyPr anchor="t" rtlCol="false" tIns="0" lIns="0" bIns="0" rIns="0">
+              <a:rPr lang="ar-EG" sz="1600" b="1">
+                <a:solidFill>
+                  <a:srgbClr val="366FB5"/>
+                </a:solidFill>
+                <a:latin typeface="Dubai" panose="020B0503030403030204" pitchFamily="34" charset="-78"/>
+                <a:ea typeface="Tahoma" panose="020B0604030504040204" pitchFamily="34" charset="0"/>
+                <a:cs typeface="Dubai" panose="020B0503030403030204" pitchFamily="34" charset="-78"/>
+                <a:sym typeface="Noto Sans Arabic Bold"/>
+                <a:rtl/>
+              </a:rPr>
+              <a:t>الاسم</a:t>
+            </a:r>
+          </a:p>
+        </p:txBody>
+      </p:sp>
+      <p:sp>
+        <p:nvSpPr>
+          <p:cNvPr id="47" name="TextBox 47"/>
+          <p:cNvSpPr txBox="1"/>
+          <p:nvPr/>
+        </p:nvSpPr>
+        <p:spPr>
+          <a:xfrm>
+            <a:off x="8584815" y="6905768"/>
+            <a:ext cx="1657893" cy="243656"/>
+          </a:xfrm>
+          <a:prstGeom prst="rect">
+            <a:avLst/>
+          </a:prstGeom>
+        </p:spPr>
+        <p:txBody>
+          <a:bodyPr wrap="square" lIns="0" tIns="0" rIns="0" bIns="0" rtlCol="0" anchor="t">
             <a:spAutoFit/>
           </a:bodyPr>
           <a:lstStyle/>
           <a:p>
-            <a:pPr algn="ctr">
+            <a:pPr algn="ctr" rtl="1">
               <a:lnSpc>
                 <a:spcPts val="1889"/>
               </a:lnSpc>
             </a:pPr>
             <a:r>
-              <a:rPr lang="en-US" sz="1350">
-                <a:solidFill>
-                  <a:srgbClr val="2C3E77"/>
-                </a:solidFill>
-                <a:latin typeface="Noto Sans Arabic"/>
-                <a:ea typeface="Noto Sans Arabic"/>
-                <a:cs typeface="Noto Sans Arabic"/>
-                <a:sym typeface="Noto Sans Arabic"/>
-              </a:rPr>
-              <a:t>{{NAME_AR}}</a:t>
-            </a:r>
-          </a:p>
-        </p:txBody>
-      </p:sp>
-      <p:sp>
-        <p:nvSpPr>
-          <p:cNvPr name="TextBox 44" id="44"/>
-          <p:cNvSpPr txBox="true"/>
-          <p:nvPr/>
-        </p:nvSpPr>
-        <p:spPr>
-          <a:xfrm rot="0">
-            <a:off x="5568953" y="8011951"/>
-            <a:ext cx="3000375" cy="232410"/>
-          </a:xfrm>
-          <a:prstGeom prst="rect">
-            <a:avLst/>
-          </a:prstGeom>
-        </p:spPr>
-        <p:txBody>
-          <a:bodyPr anchor="t" rtlCol="false" tIns="0" lIns="0" bIns="0" rIns="0">
+              <a:rPr lang="ar-EG" sz="1600" b="1">
+                <a:solidFill>
+                  <a:srgbClr val="366FB5"/>
+                </a:solidFill>
+                <a:latin typeface="Dubai" panose="020B0503030403030204" pitchFamily="34" charset="-78"/>
+                <a:ea typeface="Tahoma" panose="020B0604030504040204" pitchFamily="34" charset="0"/>
+                <a:cs typeface="Dubai" panose="020B0503030403030204" pitchFamily="34" charset="-78"/>
+                <a:sym typeface="Noto Sans Arabic Bold"/>
+                <a:rtl/>
+              </a:rPr>
+              <a:t>الجنسية</a:t>
+            </a:r>
+          </a:p>
+        </p:txBody>
+      </p:sp>
+      <p:sp>
+        <p:nvSpPr>
+          <p:cNvPr id="48" name="TextBox 48"/>
+          <p:cNvSpPr txBox="1"/>
+          <p:nvPr/>
+        </p:nvSpPr>
+        <p:spPr>
+          <a:xfrm>
+            <a:off x="8569328" y="3161424"/>
+            <a:ext cx="1666875" cy="243656"/>
+          </a:xfrm>
+          <a:prstGeom prst="rect">
+            <a:avLst/>
+          </a:prstGeom>
+        </p:spPr>
+        <p:txBody>
+          <a:bodyPr lIns="0" tIns="0" rIns="0" bIns="0" rtlCol="0" anchor="t">
             <a:spAutoFit/>
           </a:bodyPr>
           <a:lstStyle/>
           <a:p>
-            <a:pPr algn="ctr">
+            <a:pPr algn="ctr" rtl="1">
               <a:lnSpc>
                 <a:spcPts val="1889"/>
               </a:lnSpc>
             </a:pPr>
             <a:r>
-              <a:rPr lang="en-US" sz="1350">
-                <a:solidFill>
-                  <a:srgbClr val="2C3E77"/>
-                </a:solidFill>
-                <a:latin typeface="Noto Sans Arabic"/>
-                <a:ea typeface="Noto Sans Arabic"/>
-                <a:cs typeface="Noto Sans Arabic"/>
-                <a:sym typeface="Noto Sans Arabic"/>
-              </a:rPr>
-              <a:t>{{DOCTOR_NAME_AR}}</a:t>
-            </a:r>
-          </a:p>
-        </p:txBody>
-      </p:sp>
-      <p:sp>
-        <p:nvSpPr>
-          <p:cNvPr name="TextBox 45" id="45"/>
-          <p:cNvSpPr txBox="true"/>
-          <p:nvPr/>
-        </p:nvSpPr>
-        <p:spPr>
-          <a:xfrm rot="0">
-            <a:off x="7927210" y="3697100"/>
-            <a:ext cx="219475" cy="273406"/>
-          </a:xfrm>
-          <a:prstGeom prst="rect">
-            <a:avLst/>
-          </a:prstGeom>
-        </p:spPr>
-        <p:txBody>
-          <a:bodyPr anchor="t" rtlCol="false" tIns="0" lIns="0" bIns="0" rIns="0">
+              <a:rPr lang="ar-EG" sz="1600" b="1">
+                <a:solidFill>
+                  <a:srgbClr val="366FB5"/>
+                </a:solidFill>
+                <a:latin typeface="Dubai" panose="020B0503030403030204" pitchFamily="34" charset="-78"/>
+                <a:ea typeface="Tahoma" panose="020B0604030504040204" pitchFamily="34" charset="0"/>
+                <a:cs typeface="Dubai" panose="020B0503030403030204" pitchFamily="34" charset="-78"/>
+                <a:sym typeface="Noto Sans Arabic Bold"/>
+                <a:rtl/>
+              </a:rPr>
+              <a:t>رمز الإجازة</a:t>
+            </a:r>
+          </a:p>
+        </p:txBody>
+      </p:sp>
+      <p:sp>
+        <p:nvSpPr>
+          <p:cNvPr id="49" name="TextBox 49"/>
+          <p:cNvSpPr txBox="1"/>
+          <p:nvPr/>
+        </p:nvSpPr>
+        <p:spPr>
+          <a:xfrm>
+            <a:off x="8584816" y="7439292"/>
+            <a:ext cx="1651388" cy="243656"/>
+          </a:xfrm>
+          <a:prstGeom prst="rect">
+            <a:avLst/>
+          </a:prstGeom>
+        </p:spPr>
+        <p:txBody>
+          <a:bodyPr wrap="square" lIns="0" tIns="0" rIns="0" bIns="0" rtlCol="0" anchor="ctr">
             <a:spAutoFit/>
           </a:bodyPr>
           <a:lstStyle/>
           <a:p>
-            <a:pPr algn="l" rtl="true">
+            <a:pPr algn="ctr" rtl="1">
               <a:lnSpc>
                 <a:spcPts val="1889"/>
               </a:lnSpc>
             </a:pPr>
             <a:r>
-              <a:rPr lang="ar-EG" sz="1350">
-                <a:solidFill>
-                  <a:srgbClr val="FFFFFF"/>
-                </a:solidFill>
-                <a:latin typeface="Noto Sans Arabic"/>
-                <a:ea typeface="Noto Sans Arabic"/>
-                <a:cs typeface="Noto Sans Arabic"/>
-                <a:sym typeface="Noto Sans Arabic"/>
-                <a:rtl val="true"/>
-              </a:rPr>
-              <a:t>يوم</a:t>
-            </a:r>
-          </a:p>
-        </p:txBody>
-      </p:sp>
-      <p:sp>
-        <p:nvSpPr>
-          <p:cNvPr name="TextBox 46" id="46"/>
-          <p:cNvSpPr txBox="true"/>
-          <p:nvPr/>
-        </p:nvSpPr>
-        <p:spPr>
-          <a:xfrm rot="0">
-            <a:off x="8578310" y="5838711"/>
-            <a:ext cx="1657893" cy="232410"/>
-          </a:xfrm>
-          <a:prstGeom prst="rect">
-            <a:avLst/>
-          </a:prstGeom>
-        </p:spPr>
-        <p:txBody>
-          <a:bodyPr anchor="t" rtlCol="false" tIns="0" lIns="0" bIns="0" rIns="0">
+              <a:rPr lang="ar-EG" sz="1600" b="1">
+                <a:solidFill>
+                  <a:srgbClr val="366FB5"/>
+                </a:solidFill>
+                <a:latin typeface="Dubai" panose="020B0503030403030204" pitchFamily="34" charset="-78"/>
+                <a:ea typeface="Tahoma" panose="020B0604030504040204" pitchFamily="34" charset="0"/>
+                <a:cs typeface="Dubai" panose="020B0503030403030204" pitchFamily="34" charset="-78"/>
+                <a:sym typeface="Noto Sans Arabic Bold"/>
+                <a:rtl/>
+              </a:rPr>
+              <a:t>جهة العمل</a:t>
+            </a:r>
+          </a:p>
+        </p:txBody>
+      </p:sp>
+      <p:sp>
+        <p:nvSpPr>
+          <p:cNvPr id="50" name="TextBox 50"/>
+          <p:cNvSpPr txBox="1"/>
+          <p:nvPr/>
+        </p:nvSpPr>
+        <p:spPr>
+          <a:xfrm>
+            <a:off x="8578310" y="3704473"/>
+            <a:ext cx="1657893" cy="243656"/>
+          </a:xfrm>
+          <a:prstGeom prst="rect">
+            <a:avLst/>
+          </a:prstGeom>
+        </p:spPr>
+        <p:txBody>
+          <a:bodyPr lIns="0" tIns="0" rIns="0" bIns="0" rtlCol="0" anchor="t">
             <a:spAutoFit/>
           </a:bodyPr>
           <a:lstStyle/>
           <a:p>
-            <a:pPr algn="ctr" rtl="true">
+            <a:pPr algn="ctr" rtl="1">
               <a:lnSpc>
                 <a:spcPts val="1889"/>
               </a:lnSpc>
             </a:pPr>
             <a:r>
-              <a:rPr lang="ar-EG" b="true" sz="1350">
-                <a:solidFill>
-                  <a:srgbClr val="366FB5"/>
-                </a:solidFill>
-                <a:latin typeface="Noto Sans Arabic Bold"/>
-                <a:ea typeface="Noto Sans Arabic Bold"/>
-                <a:cs typeface="Noto Sans Arabic Bold"/>
+              <a:rPr lang="ar-EG" sz="1600" b="1">
+                <a:solidFill>
+                  <a:srgbClr val="FFFFFF"/>
+                </a:solidFill>
+                <a:latin typeface="Dubai" panose="020B0503030403030204" pitchFamily="34" charset="-78"/>
+                <a:ea typeface="Tahoma" panose="020B0604030504040204" pitchFamily="34" charset="0"/>
+                <a:cs typeface="Dubai" panose="020B0503030403030204" pitchFamily="34" charset="-78"/>
                 <a:sym typeface="Noto Sans Arabic Bold"/>
-                <a:rtl val="true"/>
-              </a:rPr>
-              <a:t>الاسم</a:t>
-            </a:r>
-          </a:p>
-        </p:txBody>
-      </p:sp>
-      <p:sp>
-        <p:nvSpPr>
-          <p:cNvPr name="TextBox 47" id="47"/>
-          <p:cNvSpPr txBox="true"/>
-          <p:nvPr/>
-        </p:nvSpPr>
-        <p:spPr>
-          <a:xfrm rot="0">
-            <a:off x="9102976" y="6905768"/>
-            <a:ext cx="628164" cy="273406"/>
-          </a:xfrm>
-          <a:prstGeom prst="rect">
-            <a:avLst/>
-          </a:prstGeom>
-        </p:spPr>
-        <p:txBody>
-          <a:bodyPr anchor="t" rtlCol="false" tIns="0" lIns="0" bIns="0" rIns="0">
+                <a:rtl/>
+              </a:rPr>
+              <a:t>مدة الإجازة</a:t>
+            </a:r>
+          </a:p>
+        </p:txBody>
+      </p:sp>
+      <p:sp>
+        <p:nvSpPr>
+          <p:cNvPr id="51" name="TextBox 51"/>
+          <p:cNvSpPr txBox="1"/>
+          <p:nvPr/>
+        </p:nvSpPr>
+        <p:spPr>
+          <a:xfrm>
+            <a:off x="8578310" y="4771528"/>
+            <a:ext cx="1657893" cy="243656"/>
+          </a:xfrm>
+          <a:prstGeom prst="rect">
+            <a:avLst/>
+          </a:prstGeom>
+        </p:spPr>
+        <p:txBody>
+          <a:bodyPr wrap="square" lIns="0" tIns="0" rIns="0" bIns="0" rtlCol="0" anchor="t">
             <a:spAutoFit/>
           </a:bodyPr>
           <a:lstStyle/>
           <a:p>
-            <a:pPr algn="l" rtl="true">
+            <a:pPr algn="ctr" rtl="1">
               <a:lnSpc>
                 <a:spcPts val="1889"/>
               </a:lnSpc>
             </a:pPr>
             <a:r>
-              <a:rPr lang="ar-EG" b="true" sz="1350">
+              <a:rPr lang="ar-EG" sz="1600" b="1">
                 <a:solidFill>
                   <a:srgbClr val="366FB5"/>
                 </a:solidFill>
-                <a:latin typeface="Noto Sans Arabic Bold"/>
-                <a:ea typeface="Noto Sans Arabic Bold"/>
-                <a:cs typeface="Noto Sans Arabic Bold"/>
+                <a:latin typeface="Dubai" panose="020B0503030403030204" pitchFamily="34" charset="-78"/>
+                <a:ea typeface="Tahoma" panose="020B0604030504040204" pitchFamily="34" charset="0"/>
+                <a:cs typeface="Dubai" panose="020B0503030403030204" pitchFamily="34" charset="-78"/>
                 <a:sym typeface="Noto Sans Arabic Bold"/>
-                <a:rtl val="true"/>
-              </a:rPr>
-              <a:t>الجنسية</a:t>
-            </a:r>
-          </a:p>
-        </p:txBody>
-      </p:sp>
-      <p:sp>
-        <p:nvSpPr>
-          <p:cNvPr name="TextBox 48" id="48"/>
-          <p:cNvSpPr txBox="true"/>
-          <p:nvPr/>
-        </p:nvSpPr>
-        <p:spPr>
-          <a:xfrm rot="0">
-            <a:off x="8569328" y="3161424"/>
-            <a:ext cx="1666875" cy="232410"/>
-          </a:xfrm>
-          <a:prstGeom prst="rect">
-            <a:avLst/>
-          </a:prstGeom>
-        </p:spPr>
-        <p:txBody>
-          <a:bodyPr anchor="t" rtlCol="false" tIns="0" lIns="0" bIns="0" rIns="0">
+                <a:rtl/>
+              </a:rPr>
+              <a:t>تاريخ الخروج</a:t>
+            </a:r>
+          </a:p>
+        </p:txBody>
+      </p:sp>
+      <p:sp>
+        <p:nvSpPr>
+          <p:cNvPr id="52" name="TextBox 52"/>
+          <p:cNvSpPr txBox="1"/>
+          <p:nvPr/>
+        </p:nvSpPr>
+        <p:spPr>
+          <a:xfrm>
+            <a:off x="8514489" y="4272188"/>
+            <a:ext cx="1758731" cy="243656"/>
+          </a:xfrm>
+          <a:prstGeom prst="rect">
+            <a:avLst/>
+          </a:prstGeom>
+        </p:spPr>
+        <p:txBody>
+          <a:bodyPr wrap="square" lIns="0" tIns="0" rIns="0" bIns="0" rtlCol="0" anchor="t">
             <a:spAutoFit/>
           </a:bodyPr>
           <a:lstStyle/>
           <a:p>
-            <a:pPr algn="ctr" rtl="true">
+            <a:pPr algn="ctr" rtl="1">
               <a:lnSpc>
                 <a:spcPts val="1889"/>
               </a:lnSpc>
             </a:pPr>
             <a:r>
-              <a:rPr lang="ar-EG" b="true" sz="1350">
+              <a:rPr lang="ar-EG" sz="1600" b="1">
                 <a:solidFill>
                   <a:srgbClr val="366FB5"/>
                 </a:solidFill>
-                <a:latin typeface="Noto Sans Arabic Bold"/>
-                <a:ea typeface="Noto Sans Arabic Bold"/>
-                <a:cs typeface="Noto Sans Arabic Bold"/>
+                <a:latin typeface="Dubai" panose="020B0503030403030204" pitchFamily="34" charset="-78"/>
+                <a:ea typeface="Tahoma" panose="020B0604030504040204" pitchFamily="34" charset="0"/>
+                <a:cs typeface="Dubai" panose="020B0503030403030204" pitchFamily="34" charset="-78"/>
                 <a:sym typeface="Noto Sans Arabic Bold"/>
-                <a:rtl val="true"/>
-              </a:rPr>
-              <a:t>رمز الإجازة</a:t>
-            </a:r>
-          </a:p>
-        </p:txBody>
-      </p:sp>
-      <p:sp>
-        <p:nvSpPr>
-          <p:cNvPr name="TextBox 49" id="49"/>
-          <p:cNvSpPr txBox="true"/>
-          <p:nvPr/>
-        </p:nvSpPr>
-        <p:spPr>
-          <a:xfrm rot="0">
-            <a:off x="9020556" y="7439292"/>
-            <a:ext cx="796223" cy="273406"/>
-          </a:xfrm>
-          <a:prstGeom prst="rect">
-            <a:avLst/>
-          </a:prstGeom>
-        </p:spPr>
-        <p:txBody>
-          <a:bodyPr anchor="t" rtlCol="false" tIns="0" lIns="0" bIns="0" rIns="0">
+                <a:rtl/>
+              </a:rPr>
+              <a:t>تاريخ الدخول</a:t>
+            </a:r>
+          </a:p>
+        </p:txBody>
+      </p:sp>
+      <p:sp>
+        <p:nvSpPr>
+          <p:cNvPr id="53" name="TextBox 53"/>
+          <p:cNvSpPr txBox="1"/>
+          <p:nvPr/>
+        </p:nvSpPr>
+        <p:spPr>
+          <a:xfrm>
+            <a:off x="8578310" y="7992853"/>
+            <a:ext cx="1657893" cy="243656"/>
+          </a:xfrm>
+          <a:prstGeom prst="rect">
+            <a:avLst/>
+          </a:prstGeom>
+        </p:spPr>
+        <p:txBody>
+          <a:bodyPr wrap="square" lIns="0" tIns="0" rIns="0" bIns="0" rtlCol="0" anchor="t">
             <a:spAutoFit/>
           </a:bodyPr>
           <a:lstStyle/>
           <a:p>
-            <a:pPr algn="l" rtl="true">
+            <a:pPr algn="ctr" rtl="1">
               <a:lnSpc>
                 <a:spcPts val="1889"/>
               </a:lnSpc>
             </a:pPr>
             <a:r>
-              <a:rPr lang="ar-EG" b="true" sz="1350">
+              <a:rPr lang="ar-EG" sz="1600" b="1">
                 <a:solidFill>
                   <a:srgbClr val="366FB5"/>
                 </a:solidFill>
-                <a:latin typeface="Noto Sans Arabic Bold"/>
-                <a:ea typeface="Noto Sans Arabic Bold"/>
-                <a:cs typeface="Noto Sans Arabic Bold"/>
+                <a:latin typeface="Dubai" panose="020B0503030403030204" pitchFamily="34" charset="-78"/>
+                <a:ea typeface="Tahoma" panose="020B0604030504040204" pitchFamily="34" charset="0"/>
+                <a:cs typeface="Dubai" panose="020B0503030403030204" pitchFamily="34" charset="-78"/>
                 <a:sym typeface="Noto Sans Arabic Bold"/>
-                <a:rtl val="true"/>
-              </a:rPr>
-              <a:t>جهة العمل</a:t>
-            </a:r>
-          </a:p>
-        </p:txBody>
-      </p:sp>
-      <p:sp>
-        <p:nvSpPr>
-          <p:cNvPr name="TextBox 50" id="50"/>
-          <p:cNvSpPr txBox="true"/>
-          <p:nvPr/>
-        </p:nvSpPr>
-        <p:spPr>
-          <a:xfrm rot="0">
-            <a:off x="8578310" y="3704473"/>
-            <a:ext cx="1657893" cy="232410"/>
-          </a:xfrm>
-          <a:prstGeom prst="rect">
-            <a:avLst/>
-          </a:prstGeom>
-        </p:spPr>
-        <p:txBody>
-          <a:bodyPr anchor="t" rtlCol="false" tIns="0" lIns="0" bIns="0" rIns="0">
+                <a:rtl/>
+              </a:rPr>
+              <a:t>اسم الممارس</a:t>
+            </a:r>
+          </a:p>
+        </p:txBody>
+      </p:sp>
+      <p:sp>
+        <p:nvSpPr>
+          <p:cNvPr id="54" name="TextBox 54"/>
+          <p:cNvSpPr txBox="1"/>
+          <p:nvPr/>
+        </p:nvSpPr>
+        <p:spPr>
+          <a:xfrm>
+            <a:off x="8581564" y="8574862"/>
+            <a:ext cx="1657892" cy="243656"/>
+          </a:xfrm>
+          <a:prstGeom prst="rect">
+            <a:avLst/>
+          </a:prstGeom>
+        </p:spPr>
+        <p:txBody>
+          <a:bodyPr wrap="square" lIns="0" tIns="0" rIns="0" bIns="0" rtlCol="0" anchor="t">
             <a:spAutoFit/>
           </a:bodyPr>
           <a:lstStyle/>
           <a:p>
-            <a:pPr algn="ctr" rtl="true">
+            <a:pPr algn="ctr" rtl="1">
               <a:lnSpc>
                 <a:spcPts val="1889"/>
               </a:lnSpc>
             </a:pPr>
             <a:r>
-              <a:rPr lang="ar-EG" b="true" sz="1350">
-                <a:solidFill>
-                  <a:srgbClr val="FFFFFF"/>
-                </a:solidFill>
-                <a:latin typeface="Noto Sans Arabic Bold"/>
-                <a:ea typeface="Noto Sans Arabic Bold"/>
-                <a:cs typeface="Noto Sans Arabic Bold"/>
+              <a:rPr lang="ar-EG" sz="1600" b="1">
+                <a:solidFill>
+                  <a:srgbClr val="366FB5"/>
+                </a:solidFill>
+                <a:latin typeface="Dubai" panose="020B0503030403030204" pitchFamily="34" charset="-78"/>
+                <a:ea typeface="Tahoma" panose="020B0604030504040204" pitchFamily="34" charset="0"/>
+                <a:cs typeface="Dubai" panose="020B0503030403030204" pitchFamily="34" charset="-78"/>
                 <a:sym typeface="Noto Sans Arabic Bold"/>
-                <a:rtl val="true"/>
-              </a:rPr>
-              <a:t>مدة الإجازة</a:t>
-            </a:r>
-          </a:p>
-        </p:txBody>
-      </p:sp>
-      <p:sp>
-        <p:nvSpPr>
-          <p:cNvPr name="TextBox 51" id="51"/>
-          <p:cNvSpPr txBox="true"/>
-          <p:nvPr/>
-        </p:nvSpPr>
-        <p:spPr>
-          <a:xfrm rot="0">
-            <a:off x="8956291" y="4771530"/>
-            <a:ext cx="927383" cy="273406"/>
-          </a:xfrm>
-          <a:prstGeom prst="rect">
-            <a:avLst/>
-          </a:prstGeom>
-        </p:spPr>
-        <p:txBody>
-          <a:bodyPr anchor="t" rtlCol="false" tIns="0" lIns="0" bIns="0" rIns="0">
+                <a:rtl/>
+              </a:rPr>
+              <a:t>المسمى الوظيفى</a:t>
+            </a:r>
+          </a:p>
+        </p:txBody>
+      </p:sp>
+      <p:sp>
+        <p:nvSpPr>
+          <p:cNvPr id="55" name="TextBox 55"/>
+          <p:cNvSpPr txBox="1"/>
+          <p:nvPr/>
+        </p:nvSpPr>
+        <p:spPr>
+          <a:xfrm>
+            <a:off x="8578310" y="6372235"/>
+            <a:ext cx="1657893" cy="243656"/>
+          </a:xfrm>
+          <a:prstGeom prst="rect">
+            <a:avLst/>
+          </a:prstGeom>
+        </p:spPr>
+        <p:txBody>
+          <a:bodyPr lIns="0" tIns="0" rIns="0" bIns="0" rtlCol="0" anchor="t">
             <a:spAutoFit/>
           </a:bodyPr>
           <a:lstStyle/>
           <a:p>
-            <a:pPr algn="l" rtl="true">
+            <a:pPr algn="ctr" rtl="1">
               <a:lnSpc>
                 <a:spcPts val="1889"/>
               </a:lnSpc>
             </a:pPr>
             <a:r>
-              <a:rPr lang="ar-EG" b="true" sz="1350">
+              <a:rPr lang="ar-EG" sz="1600" b="1" dirty="0">
                 <a:solidFill>
                   <a:srgbClr val="366FB5"/>
                 </a:solidFill>
-                <a:latin typeface="Noto Sans Arabic Bold"/>
-                <a:ea typeface="Noto Sans Arabic Bold"/>
-                <a:cs typeface="Noto Sans Arabic Bold"/>
+                <a:latin typeface="Dubai" panose="020B0503030403030204" pitchFamily="34" charset="-78"/>
+                <a:ea typeface="Tahoma" panose="020B0604030504040204" pitchFamily="34" charset="0"/>
+                <a:cs typeface="Dubai" panose="020B0503030403030204" pitchFamily="34" charset="-78"/>
                 <a:sym typeface="Noto Sans Arabic Bold"/>
-                <a:rtl val="true"/>
-              </a:rPr>
-              <a:t>تاريخ الخروج</a:t>
-            </a:r>
-          </a:p>
-        </p:txBody>
-      </p:sp>
-      <p:sp>
-        <p:nvSpPr>
-          <p:cNvPr name="TextBox 52" id="52"/>
-          <p:cNvSpPr txBox="true"/>
-          <p:nvPr/>
-        </p:nvSpPr>
-        <p:spPr>
-          <a:xfrm rot="0">
-            <a:off x="8941184" y="4238006"/>
-            <a:ext cx="958158" cy="273406"/>
-          </a:xfrm>
-          <a:prstGeom prst="rect">
-            <a:avLst/>
-          </a:prstGeom>
-        </p:spPr>
-        <p:txBody>
-          <a:bodyPr anchor="t" rtlCol="false" tIns="0" lIns="0" bIns="0" rIns="0">
+                <a:rtl/>
+              </a:rPr>
+              <a:t>رقم الهوية / الاقامة</a:t>
+            </a:r>
+          </a:p>
+        </p:txBody>
+      </p:sp>
+      <p:sp>
+        <p:nvSpPr>
+          <p:cNvPr id="56" name="TextBox 56"/>
+          <p:cNvSpPr txBox="1"/>
+          <p:nvPr/>
+        </p:nvSpPr>
+        <p:spPr>
+          <a:xfrm>
+            <a:off x="8578310" y="5305186"/>
+            <a:ext cx="1657893" cy="243656"/>
+          </a:xfrm>
+          <a:prstGeom prst="rect">
+            <a:avLst/>
+          </a:prstGeom>
+        </p:spPr>
+        <p:txBody>
+          <a:bodyPr wrap="square" lIns="0" tIns="0" rIns="0" bIns="0" rtlCol="0" anchor="t">
             <a:spAutoFit/>
           </a:bodyPr>
           <a:lstStyle/>
           <a:p>
-            <a:pPr algn="l" rtl="true">
+            <a:pPr algn="ctr" rtl="1">
               <a:lnSpc>
                 <a:spcPts val="1889"/>
               </a:lnSpc>
             </a:pPr>
             <a:r>
-              <a:rPr lang="ar-EG" b="true" sz="1350">
+              <a:rPr lang="ar-EG" sz="1600" b="1">
                 <a:solidFill>
                   <a:srgbClr val="366FB5"/>
                 </a:solidFill>
-                <a:latin typeface="Noto Sans Arabic Bold"/>
-                <a:ea typeface="Noto Sans Arabic Bold"/>
-                <a:cs typeface="Noto Sans Arabic Bold"/>
+                <a:latin typeface="Dubai" panose="020B0503030403030204" pitchFamily="34" charset="-78"/>
+                <a:ea typeface="Tahoma" panose="020B0604030504040204" pitchFamily="34" charset="0"/>
+                <a:cs typeface="Dubai" panose="020B0503030403030204" pitchFamily="34" charset="-78"/>
                 <a:sym typeface="Noto Sans Arabic Bold"/>
-                <a:rtl val="true"/>
-              </a:rPr>
-              <a:t>تاريخ الدخول</a:t>
-            </a:r>
-          </a:p>
-        </p:txBody>
-      </p:sp>
-      <p:sp>
-        <p:nvSpPr>
-          <p:cNvPr name="TextBox 53" id="53"/>
-          <p:cNvSpPr txBox="true"/>
-          <p:nvPr/>
-        </p:nvSpPr>
-        <p:spPr>
-          <a:xfrm rot="0">
-            <a:off x="8891397" y="7989075"/>
-            <a:ext cx="1059590" cy="273406"/>
-          </a:xfrm>
-          <a:prstGeom prst="rect">
-            <a:avLst/>
-          </a:prstGeom>
-        </p:spPr>
-        <p:txBody>
-          <a:bodyPr anchor="t" rtlCol="false" tIns="0" lIns="0" bIns="0" rIns="0">
+                <a:rtl/>
+              </a:rPr>
+              <a:t>تاريخ إصدار التقرير</a:t>
+            </a:r>
+          </a:p>
+        </p:txBody>
+      </p:sp>
+      <p:sp>
+        <p:nvSpPr>
+          <p:cNvPr id="57" name="TextBox 57"/>
+          <p:cNvSpPr txBox="1"/>
+          <p:nvPr/>
+        </p:nvSpPr>
+        <p:spPr>
+          <a:xfrm>
+            <a:off x="906018" y="10577798"/>
+            <a:ext cx="4023236" cy="782265"/>
+          </a:xfrm>
+          <a:prstGeom prst="rect">
+            <a:avLst/>
+          </a:prstGeom>
+        </p:spPr>
+        <p:txBody>
+          <a:bodyPr lIns="0" tIns="0" rIns="0" bIns="0" rtlCol="0" anchor="t">
             <a:spAutoFit/>
           </a:bodyPr>
           <a:lstStyle/>
           <a:p>
-            <a:pPr algn="l" rtl="true">
-              <a:lnSpc>
-                <a:spcPts val="1889"/>
-              </a:lnSpc>
-            </a:pPr>
-            <a:r>
-              <a:rPr lang="ar-EG" b="true" sz="1350">
-                <a:solidFill>
-                  <a:srgbClr val="366FB5"/>
-                </a:solidFill>
-                <a:latin typeface="Noto Sans Arabic Bold"/>
-                <a:ea typeface="Noto Sans Arabic Bold"/>
-                <a:cs typeface="Noto Sans Arabic Bold"/>
-                <a:sym typeface="Noto Sans Arabic Bold"/>
-                <a:rtl val="true"/>
-              </a:rPr>
-              <a:t>اسم الممارس</a:t>
-            </a:r>
-          </a:p>
-        </p:txBody>
-      </p:sp>
-      <p:sp>
-        <p:nvSpPr>
-          <p:cNvPr name="TextBox 54" id="54"/>
-          <p:cNvSpPr txBox="true"/>
-          <p:nvPr/>
-        </p:nvSpPr>
-        <p:spPr>
-          <a:xfrm rot="0">
-            <a:off x="8770877" y="8538734"/>
-            <a:ext cx="1305649" cy="273406"/>
-          </a:xfrm>
-          <a:prstGeom prst="rect">
-            <a:avLst/>
-          </a:prstGeom>
-        </p:spPr>
-        <p:txBody>
-          <a:bodyPr anchor="t" rtlCol="false" tIns="0" lIns="0" bIns="0" rIns="0">
-            <a:spAutoFit/>
-          </a:bodyPr>
-          <a:lstStyle/>
-          <a:p>
-            <a:pPr algn="l" rtl="true">
-              <a:lnSpc>
-                <a:spcPts val="1889"/>
-              </a:lnSpc>
-            </a:pPr>
-            <a:r>
-              <a:rPr lang="ar-EG" b="true" sz="1350">
-                <a:solidFill>
-                  <a:srgbClr val="366FB5"/>
-                </a:solidFill>
-                <a:latin typeface="Noto Sans Arabic Bold"/>
-                <a:ea typeface="Noto Sans Arabic Bold"/>
-                <a:cs typeface="Noto Sans Arabic Bold"/>
-                <a:sym typeface="Noto Sans Arabic Bold"/>
-                <a:rtl val="true"/>
-              </a:rPr>
-              <a:t>المسمى الوظيفى</a:t>
-            </a:r>
-          </a:p>
-        </p:txBody>
-      </p:sp>
-      <p:sp>
-        <p:nvSpPr>
-          <p:cNvPr name="TextBox 55" id="55"/>
-          <p:cNvSpPr txBox="true"/>
-          <p:nvPr/>
-        </p:nvSpPr>
-        <p:spPr>
-          <a:xfrm rot="0">
-            <a:off x="8578310" y="6372235"/>
-            <a:ext cx="1657893" cy="232410"/>
-          </a:xfrm>
-          <a:prstGeom prst="rect">
-            <a:avLst/>
-          </a:prstGeom>
-        </p:spPr>
-        <p:txBody>
-          <a:bodyPr anchor="t" rtlCol="false" tIns="0" lIns="0" bIns="0" rIns="0">
-            <a:spAutoFit/>
-          </a:bodyPr>
-          <a:lstStyle/>
-          <a:p>
-            <a:pPr algn="ctr" rtl="true">
-              <a:lnSpc>
-                <a:spcPts val="1889"/>
-              </a:lnSpc>
-            </a:pPr>
-            <a:r>
-              <a:rPr lang="ar-EG" b="true" sz="1350">
-                <a:solidFill>
-                  <a:srgbClr val="366FB5"/>
-                </a:solidFill>
-                <a:latin typeface="Noto Sans Arabic Bold"/>
-                <a:ea typeface="Noto Sans Arabic Bold"/>
-                <a:cs typeface="Noto Sans Arabic Bold"/>
-                <a:sym typeface="Noto Sans Arabic Bold"/>
-                <a:rtl val="true"/>
-              </a:rPr>
-              <a:t>رقم الهوية / الاقامة</a:t>
-            </a:r>
-          </a:p>
-        </p:txBody>
-      </p:sp>
-      <p:sp>
-        <p:nvSpPr>
-          <p:cNvPr name="TextBox 56" id="56"/>
-          <p:cNvSpPr txBox="true"/>
-          <p:nvPr/>
-        </p:nvSpPr>
-        <p:spPr>
-          <a:xfrm rot="0">
-            <a:off x="8727567" y="5305187"/>
-            <a:ext cx="1393965" cy="273406"/>
-          </a:xfrm>
-          <a:prstGeom prst="rect">
-            <a:avLst/>
-          </a:prstGeom>
-        </p:spPr>
-        <p:txBody>
-          <a:bodyPr anchor="t" rtlCol="false" tIns="0" lIns="0" bIns="0" rIns="0">
-            <a:spAutoFit/>
-          </a:bodyPr>
-          <a:lstStyle/>
-          <a:p>
-            <a:pPr algn="l" rtl="true">
-              <a:lnSpc>
-                <a:spcPts val="1889"/>
-              </a:lnSpc>
-            </a:pPr>
-            <a:r>
-              <a:rPr lang="ar-EG" b="true" sz="1350">
-                <a:solidFill>
-                  <a:srgbClr val="366FB5"/>
-                </a:solidFill>
-                <a:latin typeface="Noto Sans Arabic Bold"/>
-                <a:ea typeface="Noto Sans Arabic Bold"/>
-                <a:cs typeface="Noto Sans Arabic Bold"/>
-                <a:sym typeface="Noto Sans Arabic Bold"/>
-                <a:rtl val="true"/>
-              </a:rPr>
-              <a:t>تاريخ إصدار التقرير</a:t>
-            </a:r>
-          </a:p>
-        </p:txBody>
-      </p:sp>
-      <p:sp>
-        <p:nvSpPr>
-          <p:cNvPr name="TextBox 57" id="57"/>
-          <p:cNvSpPr txBox="true"/>
-          <p:nvPr/>
-        </p:nvSpPr>
-        <p:spPr>
-          <a:xfrm rot="0">
-            <a:off x="906018" y="10577798"/>
-            <a:ext cx="4023236" cy="786146"/>
-          </a:xfrm>
-          <a:prstGeom prst="rect">
-            <a:avLst/>
-          </a:prstGeom>
-        </p:spPr>
-        <p:txBody>
-          <a:bodyPr anchor="t" rtlCol="false" tIns="0" lIns="0" bIns="0" rIns="0">
-            <a:spAutoFit/>
-          </a:bodyPr>
-          <a:lstStyle/>
-          <a:p>
-            <a:pPr algn="ctr" rtl="true">
+            <a:pPr algn="ctr" rtl="1">
               <a:lnSpc>
                 <a:spcPts val="2376"/>
               </a:lnSpc>
             </a:pPr>
             <a:r>
-              <a:rPr lang="ar-EG" b="true" sz="1125">
+              <a:rPr lang="ar-EG" sz="1050" b="1" dirty="0">
                 <a:solidFill>
                   <a:srgbClr val="000000"/>
                 </a:solidFill>
-                <a:latin typeface="Noto Sans Arabic Bold"/>
-                <a:ea typeface="Noto Sans Arabic Bold"/>
-                <a:cs typeface="Noto Sans Arabic Bold"/>
+                <a:latin typeface="Tahoma" panose="020B0604030504040204" pitchFamily="34" charset="0"/>
+                <a:ea typeface="Tahoma" panose="020B0604030504040204" pitchFamily="34" charset="0"/>
+                <a:cs typeface="Tahoma" panose="020B0604030504040204" pitchFamily="34" charset="0"/>
                 <a:sym typeface="Noto Sans Arabic Bold"/>
-                <a:rtl val="true"/>
+                <a:rtl/>
               </a:rPr>
               <a:t>للتحقق من بيانات التقرير يرجى التأكد من زيارة موقع منصة صحة الرسمي </a:t>
             </a:r>
@@ -5389,28 +5382,78 @@
               </a:lnSpc>
             </a:pPr>
             <a:r>
-              <a:rPr lang="en-US" b="true" sz="1125">
+              <a:rPr lang="en-US" sz="1125" b="1" dirty="0">
                 <a:solidFill>
                   <a:srgbClr val="000000"/>
                 </a:solidFill>
                 <a:latin typeface="Times New Roman Bold"/>
-                <a:ea typeface="Times New Roman Bold"/>
+                <a:ea typeface="Tahoma" panose="020B0604030504040204" pitchFamily="34" charset="0"/>
                 <a:cs typeface="Times New Roman Bold"/>
                 <a:sym typeface="Times New Roman Bold"/>
               </a:rPr>
-              <a:t>To check the report please visit Seha's offical website</a:t>
-            </a:r>
-          </a:p>
-        </p:txBody>
-      </p:sp>
-      <p:sp>
-        <p:nvSpPr>
-          <p:cNvPr name="TextBox 58" id="58"/>
-          <p:cNvSpPr txBox="true"/>
-          <p:nvPr/>
-        </p:nvSpPr>
-        <p:spPr>
-          <a:xfrm rot="0">
+              <a:t>To check the report please visit </a:t>
+            </a:r>
+            <a:r>
+              <a:rPr lang="en-US" sz="1125" b="1" dirty="0" err="1">
+                <a:solidFill>
+                  <a:srgbClr val="000000"/>
+                </a:solidFill>
+                <a:latin typeface="Times New Roman Bold"/>
+                <a:ea typeface="Tahoma" panose="020B0604030504040204" pitchFamily="34" charset="0"/>
+                <a:cs typeface="Times New Roman Bold"/>
+                <a:sym typeface="Times New Roman Bold"/>
+              </a:rPr>
+              <a:t>Seha's</a:t>
+            </a:r>
+            <a:r>
+              <a:rPr lang="en-US" sz="1125" b="1" dirty="0">
+                <a:solidFill>
+                  <a:srgbClr val="000000"/>
+                </a:solidFill>
+                <a:latin typeface="Times New Roman Bold"/>
+                <a:ea typeface="Tahoma" panose="020B0604030504040204" pitchFamily="34" charset="0"/>
+                <a:cs typeface="Times New Roman Bold"/>
+                <a:sym typeface="Times New Roman Bold"/>
+              </a:rPr>
+              <a:t> </a:t>
+            </a:r>
+            <a:r>
+              <a:rPr lang="en-US" sz="1125" b="1" dirty="0" err="1">
+                <a:solidFill>
+                  <a:srgbClr val="000000"/>
+                </a:solidFill>
+                <a:latin typeface="Times New Roman Bold"/>
+                <a:ea typeface="Tahoma" panose="020B0604030504040204" pitchFamily="34" charset="0"/>
+                <a:cs typeface="Times New Roman Bold"/>
+                <a:sym typeface="Times New Roman Bold"/>
+              </a:rPr>
+              <a:t>offical</a:t>
+            </a:r>
+            <a:r>
+              <a:rPr lang="en-US" sz="1125" b="1" dirty="0">
+                <a:solidFill>
+                  <a:srgbClr val="000000"/>
+                </a:solidFill>
+                <a:latin typeface="Times New Roman Bold"/>
+                <a:ea typeface="Tahoma" panose="020B0604030504040204" pitchFamily="34" charset="0"/>
+                <a:cs typeface="Times New Roman Bold"/>
+                <a:sym typeface="Times New Roman Bold"/>
+              </a:rPr>
+              <a:t> website</a:t>
+            </a:r>
+          </a:p>
+        </p:txBody>
+      </p:sp>
+      <p:sp>
+        <p:nvSpPr>
+          <p:cNvPr id="58" name="TextBox 58">
+            <a:hlinkClick r:id="rId9" invalidUrl="http://www.sathaapp.com"/>
+          </p:cNvPr>
+          <p:cNvSpPr txBox="1"/>
+          <p:nvPr/>
+        </p:nvSpPr>
+        <p:spPr>
+          <a:xfrm>
             <a:off x="1619560" y="11440144"/>
             <a:ext cx="2592271" cy="169069"/>
           </a:xfrm>
@@ -5419,7 +5462,7 @@
           </a:prstGeom>
         </p:spPr>
         <p:txBody>
-          <a:bodyPr anchor="t" rtlCol="false" tIns="0" lIns="0" bIns="0" rIns="0">
+          <a:bodyPr lIns="0" tIns="0" rIns="0" bIns="0" rtlCol="0" anchor="t">
             <a:spAutoFit/>
           </a:bodyPr>
           <a:lstStyle/>
@@ -5430,7 +5473,7 @@
               </a:lnSpc>
             </a:pPr>
             <a:r>
-              <a:rPr lang="en-US" b="true" sz="1125">
+              <a:rPr lang="en-US" sz="1125" b="1" dirty="0" err="1">
                 <a:solidFill>
                   <a:srgbClr val="0000FF"/>
                 </a:solidFill>
@@ -5438,12 +5481,12 @@
                 <a:ea typeface="Times New Roman Bold"/>
                 <a:cs typeface="Times New Roman Bold"/>
                 <a:sym typeface="Times New Roman Bold"/>
-                <a:hlinkClick r:id="rId9" tooltip="https://sihasa.vercel.app"/>
-              </a:rPr>
-              <a:t>sihasa.vercel.app</a:t>
-            </a:r>
-            <a:r>
-              <a:rPr lang="en-US" b="true" sz="1125">
+                <a:hlinkClick r:id="rId10"/>
+              </a:rPr>
+              <a:t>www.seha.sa</a:t>
+            </a:r>
+            <a:r>
+              <a:rPr lang="en-US" sz="1125" b="1" dirty="0">
                 <a:solidFill>
                   <a:srgbClr val="0000FF"/>
                 </a:solidFill>
@@ -5451,21 +5494,31 @@
                 <a:ea typeface="Times New Roman Bold"/>
                 <a:cs typeface="Times New Roman Bold"/>
                 <a:sym typeface="Times New Roman Bold"/>
-                <a:hlinkClick r:id="rId10" tooltip="https://iVBORw0KGgoAAAANSUhEUgAAAuQAAALkAQAAAABv3x3IAAACYElEQVR4nO3aQZKjMAwFUN+A+98yN/BUzYAly04qi55N+2lBAbae2P2CpPX/WK9Gp9PpdDqdTqfT6XQ6nU6n0+l0Op1Op9Ppv1Fvta773r16/Wt4Fq4PbXQ6nU6n09P9PvfnhlSf2+h0Op1OP16/+65xuR7+jij5XdrodDqdTqdv9bhsbRvxdDqdTqfTv9QjofOWi06n0+l0+jf6fljbBPb6O+6i0Ol0Op1+sl5qSugPh7WNTqfT6fTj9V1Ff1y+Deyl6HQ6nU4/WY8vytOfinMal38bv+azMpFOp9Pp9JP1nnN5OfTx5htJHnofEU+n0+l0On3o0XUNruU5+bJvtnQ6nU6n0+kVzgvxIrzkctp8A3Q6nU6n09/tfWK6vAOXYF8Cm06n0+n0w/UMPzEdl1l6Zpdhywg6nU6n08/Vy5zg7pr0GLHrpdPpdDqdPt58373bttxaOnZFp9PpdDo9v+/uzHhX3sHfpDadTqfT6Yfo+eyBMzLFeV59htHpdDqdTt/unS5jSz6LhamNTqfT6fTj9X1XcKUy0spT0Ol0Op1+vB4xnftfo6tEcl82l1U6nU6n00/Wd5XnrPdypq9ndDqdTqefrLdaV92b7i2Hp/Jz0Ol0Op1+sn7lpei64am/zM4j8vPQ6XQ6nX60HjvubfGD7PSpuWR1GUun0+l0On2jt02VEM/pTqfT6XQ6/YMeWZ1TO0Zco5dOp9PpdPpXX5nLxDbXPbaPR4mi0+l0Ov1kvVSO3xZwIHlsmUOn0+l0+uH6zxedTqfT6XQ6nU6n0+l0Op1Op9PpdDqdTqf/Iv0P+tt93VO+3TQAAAAASUVORK5CYII="/>
+                <a:hlinkClick r:id="rId10"/>
               </a:rPr>
               <a:t>/#/inquiries/slenquiry</a:t>
             </a:r>
-          </a:p>
-        </p:txBody>
-      </p:sp>
-      <p:sp>
-        <p:nvSpPr>
-          <p:cNvPr name="TextBox 59" id="59"/>
-          <p:cNvSpPr txBox="true"/>
-          <p:nvPr/>
-        </p:nvSpPr>
-        <p:spPr>
-          <a:xfrm rot="0">
+            <a:endParaRPr lang="en-US" sz="1125" b="1" dirty="0">
+              <a:solidFill>
+                <a:srgbClr val="0000FF"/>
+              </a:solidFill>
+              <a:latin typeface="Times New Roman Bold"/>
+              <a:ea typeface="Times New Roman Bold"/>
+              <a:cs typeface="Times New Roman Bold"/>
+              <a:sym typeface="Times New Roman Bold"/>
+              <a:hlinkClick r:id="rId11" tooltip="https://iVBORw0KGgoAAAANSUhEUgAAAuQAAALkAQAAAABv3x3IAAACYElEQVR4nO3aQZKjMAwFUN+A+98yN/BUzYAly04qi55N+2lBAbae2P2CpPX/WK9Gp9PpdDqdTqfT6XQ6nU6n0+l0Op1Op9Ppv1Fvta773r16/Wt4Fq4PbXQ6nU6n09P9PvfnhlSf2+h0Op1OP16/+65xuR7+jij5XdrodDqdTqdv9bhsbRvxdDqdTqfTv9QjofOWi06n0+l0+jf6fljbBPb6O+6i0Ol0Op1+sl5qSugPh7WNTqfT6fTj9V1Ff1y+Deyl6HQ6nU4/WY8vytOfinMal38bv+azMpFOp9Pp9JP1nnN5OfTx5htJHnofEU+n0+l0On3o0XUNruU5+bJvtnQ6nU6n0+kVzgvxIrzkctp8A3Q6nU6n09/tfWK6vAOXYF8Cm06n0+n0w/UMPzEdl1l6Zpdhywg6nU6n08/Vy5zg7pr0GLHrpdPpdDqdPt58373bttxaOnZFp9PpdDo9v+/uzHhX3sHfpDadTqfT6Yfo+eyBMzLFeV59htHpdDqdTt/unS5jSz6LhamNTqfT6fTj9X1XcKUy0spT0Ol0Op1+vB4xnftfo6tEcl82l1U6nU6n00/Wd5XnrPdypq9ndDqdTqefrLdaV92b7i2Hp/Jz0Ol0Op1+sn7lpei64am/zM4j8vPQ6XQ6nX60HjvubfGD7PSpuWR1GUun0+l0On2jt02VEM/pTqfT6XQ6/YMeWZ1TO0Zco5dOp9PpdPpXX5nLxDbXPbaPR4mi0+l0Ov1kvVSO3xZwIHlsmUOn0+l0+uH6zxedTqfT6XQ6nU6n0+l0Op1Op9PpdDqdTqf/Iv0P+tt93VO+3TQAAAAASUVORK5CYII="/>
+            </a:endParaRPr>
+          </a:p>
+        </p:txBody>
+      </p:sp>
+      <p:sp>
+        <p:nvSpPr>
+          <p:cNvPr id="59" name="TextBox 59"/>
+          <p:cNvSpPr txBox="1"/>
+          <p:nvPr/>
+        </p:nvSpPr>
+        <p:spPr>
+          <a:xfrm>
             <a:off x="2878198" y="11381232"/>
             <a:ext cx="36433" cy="217399"/>
           </a:xfrm>
@@ -5474,7 +5527,7 @@
           </a:prstGeom>
         </p:spPr>
         <p:txBody>
-          <a:bodyPr anchor="t" rtlCol="false" tIns="0" lIns="0" bIns="0" rIns="0">
+          <a:bodyPr lIns="0" tIns="0" rIns="0" bIns="0" rtlCol="0" anchor="t">
             <a:spAutoFit/>
           </a:bodyPr>
           <a:lstStyle/>
@@ -5501,21 +5554,21 @@
       </p:sp>
       <p:sp>
         <p:nvSpPr>
-          <p:cNvPr name="TextBox 60" id="60"/>
-          <p:cNvSpPr txBox="true"/>
-          <p:nvPr/>
-        </p:nvSpPr>
-        <p:spPr>
-          <a:xfrm rot="0">
-            <a:off x="5521328" y="10680021"/>
-            <a:ext cx="5170672" cy="205740"/>
-          </a:xfrm>
-          <a:prstGeom prst="rect">
-            <a:avLst/>
-          </a:prstGeom>
-        </p:spPr>
-        <p:txBody>
-          <a:bodyPr anchor="t" rtlCol="false" tIns="0" lIns="0" bIns="0" rIns="0">
+          <p:cNvPr id="60" name="TextBox 60"/>
+          <p:cNvSpPr txBox="1"/>
+          <p:nvPr/>
+        </p:nvSpPr>
+        <p:spPr>
+          <a:xfrm>
+            <a:off x="5521328" y="10628364"/>
+            <a:ext cx="5170672" cy="204736"/>
+          </a:xfrm>
+          <a:prstGeom prst="rect">
+            <a:avLst/>
+          </a:prstGeom>
+        </p:spPr>
+        <p:txBody>
+          <a:bodyPr lIns="0" tIns="0" rIns="0" bIns="0" rtlCol="0" anchor="t">
             <a:spAutoFit/>
           </a:bodyPr>
           <a:lstStyle/>
@@ -5526,13 +5579,13 @@
               </a:lnSpc>
             </a:pPr>
             <a:r>
-              <a:rPr lang="en-US" b="true" sz="1275">
+              <a:rPr lang="en-US" sz="1200" b="1" dirty="0">
                 <a:solidFill>
                   <a:srgbClr val="000000"/>
                 </a:solidFill>
-                <a:latin typeface="Noto Sans Arabic Bold"/>
-                <a:ea typeface="Noto Sans Arabic Bold"/>
-                <a:cs typeface="Noto Sans Arabic Bold"/>
+                <a:latin typeface="Tahoma" panose="020B0604030504040204" pitchFamily="34" charset="0"/>
+                <a:ea typeface="Tahoma" panose="020B0604030504040204" pitchFamily="34" charset="0"/>
+                <a:cs typeface="Tahoma" panose="020B0604030504040204" pitchFamily="34" charset="0"/>
                 <a:sym typeface="Noto Sans Arabic Bold"/>
               </a:rPr>
               <a:t>{{HOSPITAL_NAME_AR}}</a:t>
@@ -5542,51 +5595,51 @@
       </p:sp>
       <p:sp>
         <p:nvSpPr>
-          <p:cNvPr name="TextBox 61" id="61"/>
-          <p:cNvSpPr txBox="true"/>
-          <p:nvPr/>
-        </p:nvSpPr>
-        <p:spPr>
-          <a:xfrm rot="0">
+          <p:cNvPr id="61" name="TextBox 61"/>
+          <p:cNvSpPr txBox="1"/>
+          <p:nvPr/>
+        </p:nvSpPr>
+        <p:spPr>
+          <a:xfrm>
             <a:off x="5530853" y="11208210"/>
-            <a:ext cx="5161147" cy="205740"/>
-          </a:xfrm>
-          <a:prstGeom prst="rect">
-            <a:avLst/>
-          </a:prstGeom>
-        </p:spPr>
-        <p:txBody>
-          <a:bodyPr anchor="t" rtlCol="false" tIns="0" lIns="0" bIns="0" rIns="0">
+            <a:ext cx="5161147" cy="209994"/>
+          </a:xfrm>
+          <a:prstGeom prst="rect">
+            <a:avLst/>
+          </a:prstGeom>
+        </p:spPr>
+        <p:txBody>
+          <a:bodyPr lIns="0" tIns="0" rIns="0" bIns="0" rtlCol="0" anchor="t">
             <a:spAutoFit/>
           </a:bodyPr>
           <a:lstStyle/>
           <a:p>
-            <a:pPr algn="ctr" rtl="true">
+            <a:pPr algn="ctr" rtl="1">
               <a:lnSpc>
                 <a:spcPts val="1784"/>
               </a:lnSpc>
             </a:pPr>
             <a:r>
-              <a:rPr lang="ar-EG" b="true" sz="1275">
+              <a:rPr lang="ar-EG" sz="1200" b="1">
                 <a:solidFill>
                   <a:srgbClr val="000000"/>
                 </a:solidFill>
-                <a:latin typeface="Noto Sans Arabic Bold"/>
-                <a:ea typeface="Noto Sans Arabic Bold"/>
-                <a:cs typeface="Noto Sans Arabic Bold"/>
+                <a:latin typeface="Tahoma" panose="020B0604030504040204" pitchFamily="34" charset="0"/>
+                <a:ea typeface="Tahoma" panose="020B0604030504040204" pitchFamily="34" charset="0"/>
+                <a:cs typeface="Tahoma" panose="020B0604030504040204" pitchFamily="34" charset="0"/>
                 <a:sym typeface="Noto Sans Arabic Bold"/>
-                <a:rtl val="true"/>
+                <a:rtl/>
               </a:rPr>
               <a:t>رقم الترخيص : </a:t>
             </a:r>
             <a:r>
-              <a:rPr lang="en-US" b="true" sz="1275">
+              <a:rPr lang="en-US" sz="1200" b="1">
                 <a:solidFill>
                   <a:srgbClr val="000000"/>
                 </a:solidFill>
-                <a:latin typeface="Noto Sans Arabic Bold"/>
-                <a:ea typeface="Noto Sans Arabic Bold"/>
-                <a:cs typeface="Noto Sans Arabic Bold"/>
+                <a:latin typeface="Tahoma" panose="020B0604030504040204" pitchFamily="34" charset="0"/>
+                <a:ea typeface="Tahoma" panose="020B0604030504040204" pitchFamily="34" charset="0"/>
+                <a:cs typeface="Tahoma" panose="020B0604030504040204" pitchFamily="34" charset="0"/>
                 <a:sym typeface="Noto Sans Arabic Bold"/>
               </a:rPr>
               <a:t>1410101201200270</a:t>
@@ -5596,13 +5649,13 @@
       </p:sp>
       <p:sp>
         <p:nvSpPr>
-          <p:cNvPr name="TextBox 62" id="62"/>
-          <p:cNvSpPr txBox="true"/>
-          <p:nvPr/>
-        </p:nvSpPr>
-        <p:spPr>
-          <a:xfrm rot="0">
-            <a:off x="4291884" y="2301223"/>
+          <p:cNvPr id="62" name="TextBox 62"/>
+          <p:cNvSpPr txBox="1"/>
+          <p:nvPr/>
+        </p:nvSpPr>
+        <p:spPr>
+          <a:xfrm>
+            <a:off x="4291884" y="2541382"/>
             <a:ext cx="2255358" cy="333578"/>
           </a:xfrm>
           <a:prstGeom prst="rect">
@@ -5610,7 +5663,7 @@
           </a:prstGeom>
         </p:spPr>
         <p:txBody>
-          <a:bodyPr anchor="t" rtlCol="false" tIns="0" lIns="0" bIns="0" rIns="0">
+          <a:bodyPr lIns="0" tIns="0" rIns="0" bIns="0" rtlCol="0" anchor="t">
             <a:spAutoFit/>
           </a:bodyPr>
           <a:lstStyle/>
@@ -5621,7 +5674,7 @@
               </a:lnSpc>
             </a:pPr>
             <a:r>
-              <a:rPr lang="en-US" b="true" sz="1867">
+              <a:rPr lang="en-US" sz="1867" b="1">
                 <a:solidFill>
                   <a:srgbClr val="2C3E77"/>
                 </a:solidFill>
@@ -5637,21 +5690,21 @@
       </p:sp>
       <p:sp>
         <p:nvSpPr>
-          <p:cNvPr name="TextBox 63" id="63"/>
-          <p:cNvSpPr txBox="true"/>
-          <p:nvPr/>
-        </p:nvSpPr>
-        <p:spPr>
-          <a:xfrm rot="0">
+          <p:cNvPr id="63" name="TextBox 63"/>
+          <p:cNvSpPr txBox="1"/>
+          <p:nvPr/>
+        </p:nvSpPr>
+        <p:spPr>
+          <a:xfrm>
             <a:off x="476250" y="12076414"/>
-            <a:ext cx="2913563" cy="322421"/>
-          </a:xfrm>
-          <a:prstGeom prst="rect">
-            <a:avLst/>
-          </a:prstGeom>
-        </p:spPr>
-        <p:txBody>
-          <a:bodyPr anchor="t" rtlCol="false" tIns="0" lIns="0" bIns="0" rIns="0">
+            <a:ext cx="2913563" cy="298030"/>
+          </a:xfrm>
+          <a:prstGeom prst="rect">
+            <a:avLst/>
+          </a:prstGeom>
+        </p:spPr>
+        <p:txBody>
+          <a:bodyPr lIns="0" tIns="0" rIns="0" bIns="0" rtlCol="0" anchor="t">
             <a:spAutoFit/>
           </a:bodyPr>
           <a:lstStyle/>
@@ -5662,7 +5715,7 @@
               </a:lnSpc>
             </a:pPr>
             <a:r>
-              <a:rPr lang="en-US" b="true" sz="1275">
+              <a:rPr lang="en-US" sz="1275" b="1" dirty="0">
                 <a:solidFill>
                   <a:srgbClr val="000000"/>
                 </a:solidFill>
@@ -5678,12 +5731,12 @@
       </p:sp>
       <p:sp>
         <p:nvSpPr>
-          <p:cNvPr name="Freeform 64" id="64"/>
+          <p:cNvPr id="64" name="Freeform 64"/>
           <p:cNvSpPr/>
           <p:nvPr/>
         </p:nvSpPr>
         <p:spPr>
-          <a:xfrm flipH="false" flipV="false" rot="0">
+          <a:xfrm>
             <a:off x="7475112" y="9291757"/>
             <a:ext cx="1343147" cy="1217227"/>
           </a:xfrm>
@@ -5692,9 +5745,9 @@
             <a:gdLst/>
             <a:ahLst/>
             <a:cxnLst/>
-            <a:rect r="r" b="b" t="t" l="l"/>
+            <a:rect l="l" t="t" r="r" b="b"/>
             <a:pathLst>
-              <a:path h="1217227" w="1343147">
+              <a:path w="1343147" h="1217227">
                 <a:moveTo>
                   <a:pt x="0" y="0"/>
                 </a:moveTo>
@@ -5715,21 +5768,28 @@
             </a:pathLst>
           </a:custGeom>
           <a:blipFill>
-            <a:blip r:embed="rId11"/>
+            <a:blip r:embed="rId12"/>
             <a:stretch>
-              <a:fillRect l="0" t="0" r="0" b="0"/>
+              <a:fillRect/>
             </a:stretch>
           </a:blipFill>
         </p:spPr>
-      </p:sp>
-      <p:sp>
-        <p:nvSpPr>
-          <p:cNvPr name="TextBox 65" id="65"/>
-          <p:cNvSpPr txBox="true"/>
-          <p:nvPr/>
-        </p:nvSpPr>
-        <p:spPr>
-          <a:xfrm rot="0">
+        <p:txBody>
+          <a:bodyPr/>
+          <a:lstStyle/>
+          <a:p>
+            <a:endParaRPr/>
+          </a:p>
+        </p:txBody>
+      </p:sp>
+      <p:sp>
+        <p:nvSpPr>
+          <p:cNvPr id="65" name="TextBox 65"/>
+          <p:cNvSpPr txBox="1"/>
+          <p:nvPr/>
+        </p:nvSpPr>
+        <p:spPr>
+          <a:xfrm>
             <a:off x="5871210" y="3694328"/>
             <a:ext cx="169288" cy="241935"/>
           </a:xfrm>
@@ -5738,7 +5798,7 @@
           </a:prstGeom>
         </p:spPr>
         <p:txBody>
-          <a:bodyPr anchor="t" rtlCol="false" tIns="0" lIns="0" bIns="0" rIns="0">
+          <a:bodyPr lIns="0" tIns="0" rIns="0" bIns="0" rtlCol="0" anchor="t">
             <a:spAutoFit/>
           </a:bodyPr>
           <a:lstStyle/>
@@ -5765,12 +5825,12 @@
       </p:sp>
       <p:sp>
         <p:nvSpPr>
-          <p:cNvPr name="TextBox 66" id="66"/>
-          <p:cNvSpPr txBox="true"/>
-          <p:nvPr/>
-        </p:nvSpPr>
-        <p:spPr>
-          <a:xfrm rot="0">
+          <p:cNvPr id="66" name="TextBox 66"/>
+          <p:cNvSpPr txBox="1"/>
+          <p:nvPr/>
+        </p:nvSpPr>
+        <p:spPr>
+          <a:xfrm>
             <a:off x="7491755" y="3708073"/>
             <a:ext cx="397016" cy="241935"/>
           </a:xfrm>
@@ -5779,7 +5839,7 @@
           </a:prstGeom>
         </p:spPr>
         <p:txBody>
-          <a:bodyPr anchor="t" rtlCol="false" tIns="0" lIns="0" bIns="0" rIns="0">
+          <a:bodyPr lIns="0" tIns="0" rIns="0" bIns="0" rtlCol="0" anchor="t">
             <a:spAutoFit/>
           </a:bodyPr>
           <a:lstStyle/>
@@ -5806,12 +5866,12 @@
       </p:sp>
       <p:sp>
         <p:nvSpPr>
-          <p:cNvPr name="TextBox 67" id="67"/>
-          <p:cNvSpPr txBox="true"/>
-          <p:nvPr/>
-        </p:nvSpPr>
-        <p:spPr>
-          <a:xfrm rot="0">
+          <p:cNvPr id="67" name="TextBox 67"/>
+          <p:cNvSpPr txBox="1"/>
+          <p:nvPr/>
+        </p:nvSpPr>
+        <p:spPr>
+          <a:xfrm>
             <a:off x="2896414" y="3694328"/>
             <a:ext cx="354715" cy="241935"/>
           </a:xfrm>
@@ -5820,7 +5880,7 @@
           </a:prstGeom>
         </p:spPr>
         <p:txBody>
-          <a:bodyPr anchor="t" rtlCol="false" tIns="0" lIns="0" bIns="0" rIns="0">
+          <a:bodyPr lIns="0" tIns="0" rIns="0" bIns="0" rtlCol="0" anchor="t">
             <a:spAutoFit/>
           </a:bodyPr>
           <a:lstStyle/>
@@ -5847,12 +5907,12 @@
       </p:sp>
       <p:sp>
         <p:nvSpPr>
-          <p:cNvPr name="TextBox 68" id="68"/>
-          <p:cNvSpPr txBox="true"/>
-          <p:nvPr/>
-        </p:nvSpPr>
-        <p:spPr>
-          <a:xfrm rot="0">
+          <p:cNvPr id="68" name="TextBox 68"/>
+          <p:cNvSpPr txBox="1"/>
+          <p:nvPr/>
+        </p:nvSpPr>
+        <p:spPr>
+          <a:xfrm>
             <a:off x="3202486" y="3694328"/>
             <a:ext cx="169288" cy="241935"/>
           </a:xfrm>
@@ -5861,7 +5921,7 @@
           </a:prstGeom>
         </p:spPr>
         <p:txBody>
-          <a:bodyPr anchor="t" rtlCol="false" tIns="0" lIns="0" bIns="0" rIns="0">
+          <a:bodyPr lIns="0" tIns="0" rIns="0" bIns="0" rtlCol="0" anchor="t">
             <a:spAutoFit/>
           </a:bodyPr>
           <a:lstStyle/>
@@ -5888,12 +5948,12 @@
       </p:sp>
       <p:sp>
         <p:nvSpPr>
-          <p:cNvPr name="TextBox 69" id="69"/>
-          <p:cNvSpPr txBox="true"/>
-          <p:nvPr/>
-        </p:nvSpPr>
-        <p:spPr>
-          <a:xfrm rot="0">
+          <p:cNvPr id="69" name="TextBox 69"/>
+          <p:cNvSpPr txBox="1"/>
+          <p:nvPr/>
+        </p:nvSpPr>
+        <p:spPr>
+          <a:xfrm>
             <a:off x="5184622" y="3690118"/>
             <a:ext cx="184225" cy="241935"/>
           </a:xfrm>
@@ -5902,7 +5962,7 @@
           </a:prstGeom>
         </p:spPr>
         <p:txBody>
-          <a:bodyPr anchor="t" rtlCol="false" tIns="0" lIns="0" bIns="0" rIns="0">
+          <a:bodyPr lIns="0" tIns="0" rIns="0" bIns="0" rtlCol="0" anchor="t">
             <a:spAutoFit/>
           </a:bodyPr>
           <a:lstStyle/>
@@ -5929,12 +5989,12 @@
       </p:sp>
       <p:sp>
         <p:nvSpPr>
-          <p:cNvPr name="TextBox 70" id="70"/>
-          <p:cNvSpPr txBox="true"/>
-          <p:nvPr/>
-        </p:nvSpPr>
-        <p:spPr>
-          <a:xfrm rot="0">
+          <p:cNvPr id="70" name="TextBox 70"/>
+          <p:cNvSpPr txBox="1"/>
+          <p:nvPr/>
+        </p:nvSpPr>
+        <p:spPr>
+          <a:xfrm>
             <a:off x="4182207" y="3686442"/>
             <a:ext cx="354715" cy="241935"/>
           </a:xfrm>
@@ -5943,7 +6003,7 @@
           </a:prstGeom>
         </p:spPr>
         <p:txBody>
-          <a:bodyPr anchor="t" rtlCol="false" tIns="0" lIns="0" bIns="0" rIns="0">
+          <a:bodyPr lIns="0" tIns="0" rIns="0" bIns="0" rtlCol="0" anchor="t">
             <a:spAutoFit/>
           </a:bodyPr>
           <a:lstStyle/>
@@ -5970,32 +6030,32 @@
       </p:sp>
       <p:sp>
         <p:nvSpPr>
-          <p:cNvPr name="TextBox 71" id="71"/>
-          <p:cNvSpPr txBox="true"/>
-          <p:nvPr/>
-        </p:nvSpPr>
-        <p:spPr>
-          <a:xfrm rot="0">
+          <p:cNvPr id="71" name="TextBox 71"/>
+          <p:cNvSpPr txBox="1"/>
+          <p:nvPr/>
+        </p:nvSpPr>
+        <p:spPr>
+          <a:xfrm>
             <a:off x="3213364" y="3685361"/>
-            <a:ext cx="917943" cy="718185"/>
-          </a:xfrm>
-          <a:prstGeom prst="rect">
-            <a:avLst/>
-          </a:prstGeom>
-        </p:spPr>
-        <p:txBody>
-          <a:bodyPr anchor="t" rtlCol="false" tIns="0" lIns="0" bIns="0" rIns="0">
+            <a:ext cx="917943" cy="710644"/>
+          </a:xfrm>
+          <a:prstGeom prst="rect">
+            <a:avLst/>
+          </a:prstGeom>
+        </p:spPr>
+        <p:txBody>
+          <a:bodyPr lIns="0" tIns="0" rIns="0" bIns="0" rtlCol="0" anchor="t">
             <a:spAutoFit/>
           </a:bodyPr>
           <a:lstStyle/>
           <a:p>
-            <a:pPr algn="r">
+            <a:pPr algn="ctr">
               <a:lnSpc>
                 <a:spcPts val="1889"/>
               </a:lnSpc>
             </a:pPr>
             <a:r>
-              <a:rPr lang="en-US" sz="1350" spc="-4">
+              <a:rPr lang="en-US" sz="1350" spc="-4" dirty="0">
                 <a:solidFill>
                   <a:srgbClr val="FFFFFF"/>
                 </a:solidFill>
@@ -6011,12 +6071,12 @@
       </p:sp>
       <p:sp>
         <p:nvSpPr>
-          <p:cNvPr name="TextBox 72" id="72"/>
-          <p:cNvSpPr txBox="true"/>
-          <p:nvPr/>
-        </p:nvSpPr>
-        <p:spPr>
-          <a:xfrm rot="0">
+          <p:cNvPr id="72" name="TextBox 72"/>
+          <p:cNvSpPr txBox="1"/>
+          <p:nvPr/>
+        </p:nvSpPr>
+        <p:spPr>
+          <a:xfrm>
             <a:off x="4358791" y="3685361"/>
             <a:ext cx="917943" cy="718185"/>
           </a:xfrm>
@@ -6025,7 +6085,7 @@
           </a:prstGeom>
         </p:spPr>
         <p:txBody>
-          <a:bodyPr anchor="t" rtlCol="false" tIns="0" lIns="0" bIns="0" rIns="0">
+          <a:bodyPr lIns="0" tIns="0" rIns="0" bIns="0" rtlCol="0" anchor="t">
             <a:spAutoFit/>
           </a:bodyPr>
           <a:lstStyle/>
@@ -6036,7 +6096,7 @@
               </a:lnSpc>
             </a:pPr>
             <a:r>
-              <a:rPr lang="en-US" sz="1350" spc="-4">
+              <a:rPr lang="en-US" sz="1350" spc="-4" dirty="0">
                 <a:solidFill>
                   <a:srgbClr val="FFFFFF"/>
                 </a:solidFill>
@@ -6052,21 +6112,132 @@
       </p:sp>
       <p:sp>
         <p:nvSpPr>
-          <p:cNvPr name="TextBox 73" id="73"/>
-          <p:cNvSpPr txBox="true"/>
-          <p:nvPr/>
-        </p:nvSpPr>
-        <p:spPr>
-          <a:xfrm rot="0">
-            <a:off x="2545871" y="7827397"/>
-            <a:ext cx="3023083" cy="386715"/>
-          </a:xfrm>
-          <a:prstGeom prst="rect">
-            <a:avLst/>
-          </a:prstGeom>
-        </p:spPr>
-        <p:txBody>
-          <a:bodyPr anchor="t" rtlCol="false" tIns="0" lIns="0" bIns="0" rIns="0">
+          <p:cNvPr id="73" name="TextBox 73"/>
+          <p:cNvSpPr txBox="1"/>
+          <p:nvPr/>
+        </p:nvSpPr>
+        <p:spPr>
+          <a:xfrm>
+            <a:off x="2530202" y="7848044"/>
+            <a:ext cx="3023082" cy="556401"/>
+          </a:xfrm>
+          <a:prstGeom prst="rect">
+            <a:avLst/>
+          </a:prstGeom>
+        </p:spPr>
+        <p:txBody>
+          <a:bodyPr wrap="square" lIns="0" tIns="0" rIns="0" bIns="0" rtlCol="0" anchor="ctr" anchorCtr="1">
+            <a:noAutofit/>
+          </a:bodyPr>
+          <a:lstStyle/>
+          <a:p>
+            <a:pPr algn="ctr"/>
+            <a:r>
+              <a:rPr lang="en-US" sz="1350" spc="-4" dirty="0">
+                <a:solidFill>
+                  <a:srgbClr val="2C3E77"/>
+                </a:solidFill>
+                <a:latin typeface="Times New Roman"/>
+                <a:ea typeface="Times New Roman"/>
+                <a:cs typeface="Times New Roman"/>
+                <a:sym typeface="Times New Roman"/>
+              </a:rPr>
+              <a:t>{{DOCTOR_NAME_EN}}</a:t>
+            </a:r>
+          </a:p>
+        </p:txBody>
+      </p:sp>
+      <p:sp>
+        <p:nvSpPr>
+          <p:cNvPr id="74" name="TextBox 74"/>
+          <p:cNvSpPr txBox="1"/>
+          <p:nvPr/>
+        </p:nvSpPr>
+        <p:spPr>
+          <a:xfrm>
+            <a:off x="2530202" y="6773813"/>
+            <a:ext cx="3023082" cy="539918"/>
+          </a:xfrm>
+          <a:prstGeom prst="rect">
+            <a:avLst/>
+          </a:prstGeom>
+        </p:spPr>
+        <p:txBody>
+          <a:bodyPr lIns="0" tIns="0" rIns="0" bIns="0" rtlCol="0" anchor="ctr" anchorCtr="1">
+            <a:noAutofit/>
+          </a:bodyPr>
+          <a:lstStyle/>
+          <a:p>
+            <a:pPr algn="ctr"/>
+            <a:r>
+              <a:rPr lang="en-US" sz="1350" spc="-4" dirty="0">
+                <a:solidFill>
+                  <a:srgbClr val="2C3E77"/>
+                </a:solidFill>
+                <a:latin typeface="Times New Roman"/>
+                <a:ea typeface="Times New Roman"/>
+                <a:cs typeface="Times New Roman"/>
+                <a:sym typeface="Times New Roman"/>
+              </a:rPr>
+              <a:t>{{NATIONALITY_EN}}</a:t>
+            </a:r>
+          </a:p>
+        </p:txBody>
+      </p:sp>
+      <p:sp>
+        <p:nvSpPr>
+          <p:cNvPr id="75" name="TextBox 75"/>
+          <p:cNvSpPr txBox="1"/>
+          <p:nvPr/>
+        </p:nvSpPr>
+        <p:spPr>
+          <a:xfrm>
+            <a:off x="2530201" y="5719920"/>
+            <a:ext cx="3023083" cy="521755"/>
+          </a:xfrm>
+          <a:prstGeom prst="rect">
+            <a:avLst/>
+          </a:prstGeom>
+        </p:spPr>
+        <p:txBody>
+          <a:bodyPr wrap="square" lIns="0" tIns="0" rIns="0" bIns="0" rtlCol="0" anchor="ctr" anchorCtr="1">
+            <a:noAutofit/>
+          </a:bodyPr>
+          <a:lstStyle/>
+          <a:p>
+            <a:pPr algn="ctr"/>
+            <a:r>
+              <a:rPr lang="en-US" sz="1350" spc="-4" dirty="0">
+                <a:solidFill>
+                  <a:srgbClr val="2C3E77"/>
+                </a:solidFill>
+                <a:latin typeface="Times New Roman"/>
+                <a:ea typeface="Times New Roman"/>
+                <a:cs typeface="Times New Roman"/>
+                <a:sym typeface="Times New Roman"/>
+              </a:rPr>
+              <a:t>{{NAME_EN}}</a:t>
+            </a:r>
+          </a:p>
+        </p:txBody>
+      </p:sp>
+      <p:sp>
+        <p:nvSpPr>
+          <p:cNvPr id="76" name="TextBox 76"/>
+          <p:cNvSpPr txBox="1"/>
+          <p:nvPr/>
+        </p:nvSpPr>
+        <p:spPr>
+          <a:xfrm>
+            <a:off x="2524117" y="3028830"/>
+            <a:ext cx="6058695" cy="367601"/>
+          </a:xfrm>
+          <a:prstGeom prst="rect">
+            <a:avLst/>
+          </a:prstGeom>
+        </p:spPr>
+        <p:txBody>
+          <a:bodyPr wrap="square" lIns="0" tIns="0" rIns="0" bIns="0" rtlCol="0" anchor="ctr">
             <a:spAutoFit/>
           </a:bodyPr>
           <a:lstStyle/>
@@ -6077,7 +6248,7 @@
               </a:lnSpc>
             </a:pPr>
             <a:r>
-              <a:rPr lang="en-US" sz="1350" spc="-4">
+              <a:rPr lang="en-US" sz="1400" spc="-4" dirty="0">
                 <a:solidFill>
                   <a:srgbClr val="2C3E77"/>
                 </a:solidFill>
@@ -6086,129 +6257,6 @@
                 <a:cs typeface="Times New Roman"/>
                 <a:sym typeface="Times New Roman"/>
               </a:rPr>
-              <a:t>{{DOCTOR_NAME_EN}}</a:t>
-            </a:r>
-          </a:p>
-        </p:txBody>
-      </p:sp>
-      <p:sp>
-        <p:nvSpPr>
-          <p:cNvPr name="TextBox 74" id="74"/>
-          <p:cNvSpPr txBox="true"/>
-          <p:nvPr/>
-        </p:nvSpPr>
-        <p:spPr>
-          <a:xfrm rot="0">
-            <a:off x="2530382" y="6752215"/>
-            <a:ext cx="3023083" cy="386715"/>
-          </a:xfrm>
-          <a:prstGeom prst="rect">
-            <a:avLst/>
-          </a:prstGeom>
-        </p:spPr>
-        <p:txBody>
-          <a:bodyPr anchor="t" rtlCol="false" tIns="0" lIns="0" bIns="0" rIns="0">
-            <a:spAutoFit/>
-          </a:bodyPr>
-          <a:lstStyle/>
-          <a:p>
-            <a:pPr algn="ctr">
-              <a:lnSpc>
-                <a:spcPts val="3375"/>
-              </a:lnSpc>
-            </a:pPr>
-            <a:r>
-              <a:rPr lang="en-US" sz="1350" spc="-4">
-                <a:solidFill>
-                  <a:srgbClr val="2C3E77"/>
-                </a:solidFill>
-                <a:latin typeface="Times New Roman"/>
-                <a:ea typeface="Times New Roman"/>
-                <a:cs typeface="Times New Roman"/>
-                <a:sym typeface="Times New Roman"/>
-              </a:rPr>
-              <a:t>{{NATIONALITY_EN}}</a:t>
-            </a:r>
-          </a:p>
-        </p:txBody>
-      </p:sp>
-      <p:sp>
-        <p:nvSpPr>
-          <p:cNvPr name="TextBox 75" id="75"/>
-          <p:cNvSpPr txBox="true"/>
-          <p:nvPr/>
-        </p:nvSpPr>
-        <p:spPr>
-          <a:xfrm rot="0">
-            <a:off x="2541489" y="5680529"/>
-            <a:ext cx="3023083" cy="386715"/>
-          </a:xfrm>
-          <a:prstGeom prst="rect">
-            <a:avLst/>
-          </a:prstGeom>
-        </p:spPr>
-        <p:txBody>
-          <a:bodyPr anchor="t" rtlCol="false" tIns="0" lIns="0" bIns="0" rIns="0">
-            <a:spAutoFit/>
-          </a:bodyPr>
-          <a:lstStyle/>
-          <a:p>
-            <a:pPr algn="ctr">
-              <a:lnSpc>
-                <a:spcPts val="3375"/>
-              </a:lnSpc>
-            </a:pPr>
-            <a:r>
-              <a:rPr lang="en-US" sz="1350" spc="-4">
-                <a:solidFill>
-                  <a:srgbClr val="2C3E77"/>
-                </a:solidFill>
-                <a:latin typeface="Times New Roman"/>
-                <a:ea typeface="Times New Roman"/>
-                <a:cs typeface="Times New Roman"/>
-                <a:sym typeface="Times New Roman"/>
-              </a:rPr>
-              <a:t>{{NAME_EN}}</a:t>
-            </a:r>
-          </a:p>
-        </p:txBody>
-      </p:sp>
-      <p:sp>
-        <p:nvSpPr>
-          <p:cNvPr name="TextBox 76" id="76"/>
-          <p:cNvSpPr txBox="true"/>
-          <p:nvPr/>
-        </p:nvSpPr>
-        <p:spPr>
-          <a:xfrm rot="0">
-            <a:off x="2510633" y="3012896"/>
-            <a:ext cx="6107877" cy="386715"/>
-          </a:xfrm>
-          <a:prstGeom prst="rect">
-            <a:avLst/>
-          </a:prstGeom>
-        </p:spPr>
-        <p:txBody>
-          <a:bodyPr anchor="t" rtlCol="false" tIns="0" lIns="0" bIns="0" rIns="0">
-            <a:spAutoFit/>
-          </a:bodyPr>
-          <a:lstStyle/>
-          <a:p>
-            <a:pPr algn="ctr">
-              <a:lnSpc>
-                <a:spcPts val="3375"/>
-              </a:lnSpc>
-            </a:pPr>
-            <a:r>
-              <a:rPr lang="en-US" sz="1350" spc="-4">
-                <a:solidFill>
-                  <a:srgbClr val="2C3E77"/>
-                </a:solidFill>
-                <a:latin typeface="Times New Roman"/>
-                <a:ea typeface="Times New Roman"/>
-                <a:cs typeface="Times New Roman"/>
-                <a:sym typeface="Times New Roman"/>
-              </a:rPr>
               <a:t>{{SERVICE_CODE}}</a:t>
             </a:r>
           </a:p>
@@ -6216,21 +6264,21 @@
       </p:sp>
       <p:sp>
         <p:nvSpPr>
-          <p:cNvPr name="TextBox 77" id="77"/>
-          <p:cNvSpPr txBox="true"/>
-          <p:nvPr/>
-        </p:nvSpPr>
-        <p:spPr>
-          <a:xfrm rot="0">
-            <a:off x="5530853" y="10925065"/>
-            <a:ext cx="5170672" cy="224790"/>
-          </a:xfrm>
-          <a:prstGeom prst="rect">
-            <a:avLst/>
-          </a:prstGeom>
-        </p:spPr>
-        <p:txBody>
-          <a:bodyPr anchor="t" rtlCol="false" tIns="0" lIns="0" bIns="0" rIns="0">
+          <p:cNvPr id="77" name="TextBox 77"/>
+          <p:cNvSpPr txBox="1"/>
+          <p:nvPr/>
+        </p:nvSpPr>
+        <p:spPr>
+          <a:xfrm>
+            <a:off x="5530853" y="10909300"/>
+            <a:ext cx="5170672" cy="215252"/>
+          </a:xfrm>
+          <a:prstGeom prst="rect">
+            <a:avLst/>
+          </a:prstGeom>
+        </p:spPr>
+        <p:txBody>
+          <a:bodyPr lIns="0" tIns="0" rIns="0" bIns="0" rtlCol="0" anchor="t">
             <a:spAutoFit/>
           </a:bodyPr>
           <a:lstStyle/>
@@ -6241,7 +6289,7 @@
               </a:lnSpc>
             </a:pPr>
             <a:r>
-              <a:rPr lang="en-US" b="true" sz="1275">
+              <a:rPr lang="en-US" sz="1400" b="1" dirty="0">
                 <a:solidFill>
                   <a:srgbClr val="000000"/>
                 </a:solidFill>
@@ -6257,21 +6305,21 @@
       </p:sp>
       <p:sp>
         <p:nvSpPr>
-          <p:cNvPr name="TextBox 78" id="78"/>
-          <p:cNvSpPr txBox="true"/>
-          <p:nvPr/>
-        </p:nvSpPr>
-        <p:spPr>
-          <a:xfrm rot="0">
+          <p:cNvPr id="78" name="TextBox 78"/>
+          <p:cNvSpPr txBox="1"/>
+          <p:nvPr/>
+        </p:nvSpPr>
+        <p:spPr>
+          <a:xfrm>
             <a:off x="476250" y="11771138"/>
-            <a:ext cx="2913563" cy="322421"/>
-          </a:xfrm>
-          <a:prstGeom prst="rect">
-            <a:avLst/>
-          </a:prstGeom>
-        </p:spPr>
-        <p:txBody>
-          <a:bodyPr anchor="t" rtlCol="false" tIns="0" lIns="0" bIns="0" rIns="0">
+            <a:ext cx="2913563" cy="298030"/>
+          </a:xfrm>
+          <a:prstGeom prst="rect">
+            <a:avLst/>
+          </a:prstGeom>
+        </p:spPr>
+        <p:txBody>
+          <a:bodyPr lIns="0" tIns="0" rIns="0" bIns="0" rtlCol="0" anchor="t">
             <a:spAutoFit/>
           </a:bodyPr>
           <a:lstStyle/>
@@ -6282,7 +6330,7 @@
               </a:lnSpc>
             </a:pPr>
             <a:r>
-              <a:rPr lang="en-US" b="true" sz="1275">
+              <a:rPr lang="en-US" sz="1275" b="1" dirty="0">
                 <a:solidFill>
                   <a:srgbClr val="000000"/>
                 </a:solidFill>
@@ -6292,6 +6340,49 @@
                 <a:sym typeface="Times New Roman Bold"/>
               </a:rPr>
               <a:t>{{PRINT_TIME}}</a:t>
+            </a:r>
+          </a:p>
+        </p:txBody>
+      </p:sp>
+      <p:sp>
+        <p:nvSpPr>
+          <p:cNvPr id="82" name="TextBox 76">
+            <a:extLst>
+              <a:ext uri="{FF2B5EF4-FFF2-40B4-BE49-F238E27FC236}">
+                <a16:creationId xmlns:a16="http://schemas.microsoft.com/office/drawing/2014/main" id="{874BD78B-64DD-E746-7E3B-A30A1E6476F1}"/>
+              </a:ext>
+            </a:extLst>
+          </p:cNvPr>
+          <p:cNvSpPr txBox="1"/>
+          <p:nvPr/>
+        </p:nvSpPr>
+        <p:spPr>
+          <a:xfrm>
+            <a:off x="2530202" y="6245643"/>
+            <a:ext cx="6054614" cy="529493"/>
+          </a:xfrm>
+          <a:prstGeom prst="rect">
+            <a:avLst/>
+          </a:prstGeom>
+        </p:spPr>
+        <p:txBody>
+          <a:bodyPr wrap="square" lIns="0" tIns="0" rIns="0" bIns="0" rtlCol="0" anchor="ctr" anchorCtr="1">
+            <a:noAutofit/>
+          </a:bodyPr>
+          <a:lstStyle/>
+          <a:p>
+            <a:pPr algn="ctr"/>
+            <a:r>
+              <a:rPr lang="en-US" sz="1400" spc="-4" dirty="0">
+                <a:solidFill>
+                  <a:srgbClr val="2C3E77"/>
+                </a:solidFill>
+                <a:latin typeface="Times New Roman"/>
+                <a:ea typeface="Times New Roman"/>
+                <a:cs typeface="Times New Roman"/>
+                <a:sym typeface="Times New Roman"/>
+              </a:rPr>
+              <a:t>{{ID_NUMBER}}</a:t>
             </a:r>
           </a:p>
         </p:txBody>
